--- a/presentations/PR_L03_Selection_Lesson.pptx
+++ b/presentations/PR_L03_Selection_Lesson.pptx
@@ -2167,7 +2167,7 @@
                 <a:ea typeface="IBM Plex Sans" pitchFamily="34" charset="-122"/>
                 <a:cs typeface="IBM Plex Sans" pitchFamily="34" charset="-120"/>
               </a:rPr>
-              <a:t>A program that always does the same thing is not much use. At the decision gate you will write the conditions that let a program choose, from a single comparison to a whole nest of them.</a:t>
+              <a:t>A program that always does the same thing is not much use. Work through the six stations and you will write the conditions that let a program choose, from a single comparison to a whole nest of them.</a:t>
             </a:r>
             <a:endParaRPr lang="en-US" sz="1800" dirty="0"/>
           </a:p>
@@ -2725,7 +2725,7 @@
                 <a:ea typeface="IBM Plex Sans" pitchFamily="34" charset="-122"/>
                 <a:cs typeface="IBM Plex Sans" pitchFamily="34" charset="-120"/>
               </a:rPr>
-              <a:t>Which three totals would you test on a medal program with cut-offs at 27 and 24?</a:t>
+              <a:t>Which three values would you test on a program whose bands change at 30 and 50?</a:t>
             </a:r>
             <a:endParaRPr lang="en-US" sz="1600" dirty="0"/>
           </a:p>
@@ -2805,7 +2805,7 @@
                 <a:ea typeface="IBM Plex Sans" pitchFamily="34" charset="-122"/>
                 <a:cs typeface="IBM Plex Sans" pitchFamily="34" charset="-120"/>
               </a:rPr>
-              <a:t>An off-by-one error at a boundary is one of the most common bugs there is.</a:t>
+              <a:t>A mistake at the edge of a band is so common that it has its own name: an...</a:t>
             </a:r>
             <a:endParaRPr lang="en-US" sz="1600" dirty="0"/>
           </a:p>
@@ -3104,7 +3104,7 @@
                 <a:ea typeface="IBM Plex Sans" pitchFamily="34" charset="-122"/>
                 <a:cs typeface="IBM Plex Sans" pitchFamily="34" charset="-120"/>
               </a:rPr>
-              <a:t>The wind is 15, the visibility is 8 and the alarm is off. Tap the star and decide whether each condition is True or False.</a:t>
+              <a:t>Three variables hold these values: wind is 15, vis is 8 and alarm is False. Tap the star and decide whether each condition is True or False.</a:t>
             </a:r>
             <a:endParaRPr lang="en-US" sz="2200" dirty="0"/>
           </a:p>
@@ -4060,7 +4060,7 @@
                 <a:ea typeface="IBM Plex Sans" pitchFamily="34" charset="-122"/>
                 <a:cs typeface="IBM Plex Sans" pitchFamily="34" charset="-120"/>
               </a:rPr>
-              <a:t>A car park charges 2 pounds for up to 2 hours and 5 pounds for longer. A pupil writes if hours &gt; 2 then prints 2, and else prints 5. Identify the logic error and write the two lines corrected.</a:t>
+              <a:t>A program should print cheap when a number is 2 or less and dear when it is more. A pupil writes if n &gt; 2 then prints cheap, and else prints dear. Identify the logic error and write the two lines corrected.</a:t>
             </a:r>
             <a:endParaRPr lang="en-US" sz="1700" dirty="0"/>
           </a:p>
@@ -4190,7 +4190,7 @@
                 <a:ea typeface="IBM Plex Sans" pitchFamily="34" charset="-122"/>
                 <a:cs typeface="IBM Plex Sans" pitchFamily="34" charset="-120"/>
               </a:rPr>
-              <a:t>Write a program that reads a wind speed in mph and prints Calm below 8, Breezy from 8 up to but not including 25, and Gale at 25 or more.</a:t>
+              <a:t>Write a program that reads a whole number and prints small when it is 10 or less, medium when it is more than 10 but 100 or less, and large when it is more than 100.</a:t>
             </a:r>
             <a:endParaRPr lang="en-US" sz="1700" dirty="0"/>
           </a:p>
@@ -4320,7 +4320,7 @@
                 <a:ea typeface="IBM Plex Sans" pitchFamily="34" charset="-122"/>
                 <a:cs typeface="IBM Plex Sans" pitchFamily="34" charset="-120"/>
               </a:rPr>
-              <a:t>Write a program that reads a greenhouse temperature and whether the roof vent is open, and prints Open the vent only when the temperature is above 28 degrees and the vent is shut.</a:t>
+              <a:t>Write a program that reads a whole number and then a word, and prints open only when the number is 3 or 7 and the word is not locked. Otherwise it prints refused.</a:t>
             </a:r>
             <a:endParaRPr lang="en-US" sz="1700" dirty="0"/>
           </a:p>
@@ -6788,7 +6788,7 @@
                 <a:ea typeface="IBM Plex Sans" pitchFamily="34" charset="-122"/>
                 <a:cs typeface="IBM Plex Sans" pitchFamily="34" charset="-120"/>
               </a:rPr>
-              <a:t>A program holds three branches: if score &gt; 20 prints Gold, elif score &gt; 10 prints Silver, and else prints Bronze. Write down what is printed when score is 30, when it is 11, and when it is 10.</a:t>
+              <a:t>A program has three branches: if n &gt; 20 it prints big, elif n &gt; 10 it prints middle, and else it prints small. Write down what is printed when n is 30, when it is 11, and when it is 10.</a:t>
             </a:r>
             <a:endParaRPr lang="en-US" sz="2600" dirty="0"/>
           </a:p>
@@ -8159,7 +8159,7 @@
                 <a:ea typeface="IBM Plex Sans" pitchFamily="34" charset="-122"/>
                 <a:cs typeface="IBM Plex Sans" pitchFamily="34" charset="-120"/>
               </a:rPr>
-              <a:t>A value that can only be True or False is named after George Boole, who returns in topic 2.4.</a:t>
+              <a:t>A value that can only be True or False is named after George Boole, so it is called a...</a:t>
             </a:r>
             <a:endParaRPr lang="en-US" sz="1600" dirty="0"/>
           </a:p>
@@ -8655,7 +8655,7 @@
                 <a:ea typeface="IBM Plex Sans" pitchFamily="34" charset="-122"/>
                 <a:cs typeface="IBM Plex Sans" pitchFamily="34" charset="-120"/>
               </a:rPr>
-              <a:t>Why does a lift loaded to exactly its 450 kg limit need careful wording?</a:t>
+              <a:t>Why does a rule worded as '20 or more' need &gt;= rather than &gt;?</a:t>
             </a:r>
             <a:endParaRPr lang="en-US" sz="1600" dirty="0"/>
           </a:p>
@@ -8735,7 +8735,7 @@
                 <a:ea typeface="IBM Plex Sans" pitchFamily="34" charset="-122"/>
                 <a:cs typeface="IBM Plex Sans" pitchFamily="34" charset="-120"/>
               </a:rPr>
-              <a:t>Python uses indentation where most languages use brackets, so layout is part of the code.</a:t>
+              <a:t>Python uses indentation where most languages use brackets, so the layout is part of the...</a:t>
             </a:r>
             <a:endParaRPr lang="en-US" sz="1600" dirty="0"/>
           </a:p>
@@ -9231,7 +9231,7 @@
                 <a:ea typeface="IBM Plex Sans" pitchFamily="34" charset="-122"/>
                 <a:cs typeface="IBM Plex Sans" pitchFamily="34" charset="-120"/>
               </a:rPr>
-              <a:t>Why must the weight bands of a courier's price list be tested in order?</a:t>
+              <a:t>Why must the bands of a grade boundary list be tested in order?</a:t>
             </a:r>
             <a:endParaRPr lang="en-US" sz="1600" dirty="0"/>
           </a:p>
@@ -9311,7 +9311,7 @@
                 <a:ea typeface="IBM Plex Sans" pitchFamily="34" charset="-122"/>
                 <a:cs typeface="IBM Plex Sans" pitchFamily="34" charset="-120"/>
               </a:rPr>
-              <a:t>elif is short for 'else if', and some languages make you write both words out.</a:t>
+              <a:t>elif is short for two words that some languages make you write out in full:...</a:t>
             </a:r>
             <a:endParaRPr lang="en-US" sz="1600" dirty="0"/>
           </a:p>
@@ -9675,7 +9675,7 @@
                 <a:ea typeface="IBM Plex Sans" pitchFamily="34" charset="-122"/>
                 <a:cs typeface="IBM Plex Sans" pitchFamily="34" charset="-120"/>
               </a:rPr>
-              <a:t>not flips a condition over, so not raining is True whenever raining is False.</a:t>
+              <a:t>not flips a condition over, so not found is True whenever found is False.</a:t>
             </a:r>
             <a:endParaRPr lang="en-US" sz="1700" dirty="0"/>
           </a:p>
@@ -9699,7 +9699,7 @@
                 <a:ea typeface="IBM Plex Sans" pitchFamily="34" charset="-122"/>
                 <a:cs typeface="IBM Plex Sans" pitchFamily="34" charset="-120"/>
               </a:rPr>
-              <a:t>Common mistake: writing wind &lt; 20 or 30, which Python reads as something quite different.</a:t>
+              <a:t>Common mistake: writing n == 3 or 7, which Python reads as something quite different.</a:t>
             </a:r>
             <a:endParaRPr lang="en-US" sz="1700" dirty="0"/>
           </a:p>
@@ -9807,7 +9807,7 @@
                 <a:ea typeface="IBM Plex Sans" pitchFamily="34" charset="-122"/>
                 <a:cs typeface="IBM Plex Sans" pitchFamily="34" charset="-120"/>
               </a:rPr>
-              <a:t>Write the condition for a drone allowed up in light wind and good visibility.</a:t>
+              <a:t>How would you test in one condition whether a number is either 3 or 7?</a:t>
             </a:r>
             <a:endParaRPr lang="en-US" sz="1600" dirty="0"/>
           </a:p>
@@ -9887,7 +9887,7 @@
                 <a:ea typeface="IBM Plex Sans" pitchFamily="34" charset="-122"/>
                 <a:cs typeface="IBM Plex Sans" pitchFamily="34" charset="-120"/>
               </a:rPr>
-              <a:t>Python stops reading an and as soon as one side is False, which is called short-circuiting.</a:t>
+              <a:t>Python stops reading an and as soon as one side is False, which is called...</a:t>
             </a:r>
             <a:endParaRPr lang="en-US" sz="1600" dirty="0"/>
           </a:p>
@@ -10383,7 +10383,7 @@
                 <a:ea typeface="IBM Plex Sans" pitchFamily="34" charset="-122"/>
                 <a:cs typeface="IBM Plex Sans" pitchFamily="34" charset="-120"/>
               </a:rPr>
-              <a:t>Rewrite a nested if as one condition joined with and.</a:t>
+              <a:t>When is a nested if clearer than one condition joined with and?</a:t>
             </a:r>
             <a:endParaRPr lang="en-US" sz="1600" dirty="0"/>
           </a:p>
@@ -10463,7 +10463,7 @@
                 <a:ea typeface="IBM Plex Sans" pitchFamily="34" charset="-122"/>
                 <a:cs typeface="IBM Plex Sans" pitchFamily="34" charset="-120"/>
               </a:rPr>
-              <a:t>Deeply nested ifs are so hard to follow that programmers call the shape the arrow of doom.</a:t>
+              <a:t>Deeply nested ifs are so hard to follow that programmers call the shape the...</a:t>
             </a:r>
             <a:endParaRPr lang="en-US" sz="1600" dirty="0"/>
           </a:p>

--- a/presentations/PR_L03_Selection_Lesson.pptx
+++ b/presentations/PR_L03_Selection_Lesson.pptx
@@ -4060,7 +4060,143 @@
                 <a:ea typeface="IBM Plex Sans" pitchFamily="34" charset="-122"/>
                 <a:cs typeface="IBM Plex Sans" pitchFamily="34" charset="-120"/>
               </a:rPr>
-              <a:t>A program should print cheap when a number is 2 or less and dear when it is more. A pupil writes if n &gt; 2 then prints cheap, and else prints dear. Identify the logic error and write the two lines corrected.</a:t>
+              <a:t>A program should print cheap when a number is 2 or less and dear when it is more. A pupil writes </a:t>
+            </a:r>
+            <a:pPr indent="0" marL="0">
+              <a:lnSpc>
+                <a:spcPct val="118000"/>
+              </a:lnSpc>
+              <a:buNone/>
+            </a:pPr>
+            <a:r>
+              <a:rPr lang="en-US" sz="1700" dirty="0">
+                <a:solidFill>
+                  <a:srgbClr val="6B21A8"/>
+                </a:solidFill>
+                <a:latin typeface="IBM Plex Mono" pitchFamily="34" charset="0"/>
+                <a:ea typeface="IBM Plex Mono" pitchFamily="34" charset="-122"/>
+                <a:cs typeface="IBM Plex Mono" pitchFamily="34" charset="-120"/>
+              </a:rPr>
+              <a:t>if</a:t>
+            </a:r>
+            <a:pPr indent="0" marL="0">
+              <a:lnSpc>
+                <a:spcPct val="118000"/>
+              </a:lnSpc>
+              <a:buNone/>
+            </a:pPr>
+            <a:r>
+              <a:rPr lang="en-US" sz="1700" dirty="0">
+                <a:solidFill>
+                  <a:srgbClr val="18181B"/>
+                </a:solidFill>
+                <a:latin typeface="IBM Plex Mono" pitchFamily="34" charset="0"/>
+                <a:ea typeface="IBM Plex Mono" pitchFamily="34" charset="-122"/>
+                <a:cs typeface="IBM Plex Mono" pitchFamily="34" charset="-120"/>
+              </a:rPr>
+              <a:t> </a:t>
+            </a:r>
+            <a:pPr indent="0" marL="0">
+              <a:lnSpc>
+                <a:spcPct val="118000"/>
+              </a:lnSpc>
+              <a:buNone/>
+            </a:pPr>
+            <a:r>
+              <a:rPr lang="en-US" sz="1700" dirty="0">
+                <a:solidFill>
+                  <a:srgbClr val="18181B"/>
+                </a:solidFill>
+                <a:latin typeface="IBM Plex Mono" pitchFamily="34" charset="0"/>
+                <a:ea typeface="IBM Plex Mono" pitchFamily="34" charset="-122"/>
+                <a:cs typeface="IBM Plex Mono" pitchFamily="34" charset="-120"/>
+              </a:rPr>
+              <a:t>n</a:t>
+            </a:r>
+            <a:pPr indent="0" marL="0">
+              <a:lnSpc>
+                <a:spcPct val="118000"/>
+              </a:lnSpc>
+              <a:buNone/>
+            </a:pPr>
+            <a:r>
+              <a:rPr lang="en-US" sz="1700" dirty="0">
+                <a:solidFill>
+                  <a:srgbClr val="18181B"/>
+                </a:solidFill>
+                <a:latin typeface="IBM Plex Mono" pitchFamily="34" charset="0"/>
+                <a:ea typeface="IBM Plex Mono" pitchFamily="34" charset="-122"/>
+                <a:cs typeface="IBM Plex Mono" pitchFamily="34" charset="-120"/>
+              </a:rPr>
+              <a:t> </a:t>
+            </a:r>
+            <a:pPr indent="0" marL="0">
+              <a:lnSpc>
+                <a:spcPct val="118000"/>
+              </a:lnSpc>
+              <a:buNone/>
+            </a:pPr>
+            <a:r>
+              <a:rPr lang="en-US" sz="1700" dirty="0">
+                <a:solidFill>
+                  <a:srgbClr val="3F3F46"/>
+                </a:solidFill>
+                <a:latin typeface="IBM Plex Mono" pitchFamily="34" charset="0"/>
+                <a:ea typeface="IBM Plex Mono" pitchFamily="34" charset="-122"/>
+                <a:cs typeface="IBM Plex Mono" pitchFamily="34" charset="-120"/>
+              </a:rPr>
+              <a:t>&gt;</a:t>
+            </a:r>
+            <a:pPr indent="0" marL="0">
+              <a:lnSpc>
+                <a:spcPct val="118000"/>
+              </a:lnSpc>
+              <a:buNone/>
+            </a:pPr>
+            <a:r>
+              <a:rPr lang="en-US" sz="1700" dirty="0">
+                <a:solidFill>
+                  <a:srgbClr val="18181B"/>
+                </a:solidFill>
+                <a:latin typeface="IBM Plex Mono" pitchFamily="34" charset="0"/>
+                <a:ea typeface="IBM Plex Mono" pitchFamily="34" charset="-122"/>
+                <a:cs typeface="IBM Plex Mono" pitchFamily="34" charset="-120"/>
+              </a:rPr>
+              <a:t> </a:t>
+            </a:r>
+            <a:pPr indent="0" marL="0">
+              <a:lnSpc>
+                <a:spcPct val="118000"/>
+              </a:lnSpc>
+              <a:buNone/>
+            </a:pPr>
+            <a:r>
+              <a:rPr lang="en-US" sz="1700" dirty="0">
+                <a:solidFill>
+                  <a:srgbClr val="9A3412"/>
+                </a:solidFill>
+                <a:latin typeface="IBM Plex Mono" pitchFamily="34" charset="0"/>
+                <a:ea typeface="IBM Plex Mono" pitchFamily="34" charset="-122"/>
+                <a:cs typeface="IBM Plex Mono" pitchFamily="34" charset="-120"/>
+              </a:rPr>
+              <a:t>2</a:t>
+            </a:r>
+            <a:pPr indent="0" marL="0">
+              <a:lnSpc>
+                <a:spcPct val="118000"/>
+              </a:lnSpc>
+              <a:buNone/>
+            </a:pPr>
+            <a:r>
+              <a:rPr lang="en-US" sz="1700" dirty="0">
+                <a:solidFill>
+                  <a:srgbClr val="101828"/>
+                </a:solidFill>
+                <a:latin typeface="IBM Plex Sans" pitchFamily="34" charset="0"/>
+                <a:ea typeface="IBM Plex Sans" pitchFamily="34" charset="-122"/>
+                <a:cs typeface="IBM Plex Sans" pitchFamily="34" charset="-120"/>
+              </a:rPr>
+              <a:t> then prints cheap, and else prints dear. Identify the logic error and write the two lines corrected.</a:t>
             </a:r>
             <a:endParaRPr lang="en-US" sz="1700" dirty="0"/>
           </a:p>

--- a/presentations/PR_L03_Selection_Lesson.pptx
+++ b/presentations/PR_L03_Selection_Lesson.pptx
@@ -19,9 +19,10 @@
     <p:sldId id="267" r:id="rId13"/>
     <p:sldId id="268" r:id="rId14"/>
     <p:sldId id="269" r:id="rId15"/>
+    <p:sldId id="270" r:id="rId16"/>
   </p:sldIdLst>
   <p:notesMasterIdLst>
-    <p:notesMasterId r:id="rId16"/>
+    <p:notesMasterId r:id="rId17"/>
   </p:notesMasterIdLst>
   <p:sldSz cx="12192000" cy="6858000"/>
   <p:notesSz cx="6858000" cy="12192000"/>
@@ -692,7 +693,14 @@
           <a:p>
             <a:r>
               <a:rPr lang="en-US" dirty="0"/>
-              <a:t>Make them commit to an answer on paper before they tap the star. Guessing first costs them the learning.</a:t>
+              <a:t>The answer is B: True
+False.
+Do not say it yet. Every pupil commits first - fingers, whiteboards or a show of hands on each letter in turn - and you count the split before anyone can change their mind.
+IF MOST OF THE CLASS IS RIGHT: say why it is right in one sentence and go straight on to the independent work.
+IF A SIGNIFICANT GROUP IS ON ONE WRONG LETTER: that option is the misconception to teach against before anyone goes on. Go back to station 4, AND, OR and NOT, and work through its example again, aloud, with the class watching, then re-ask this question.
+The course's own response to a wrong answer here: or needs only one True side. On the second line neither side is True, so the whole thing is False.
+A limitation, stated rather than papered over: one response covers every wrong option; it does not say what to revisit for each one. The course does not record what each separate wrong option means, and this slide does not invent it. Decide your own reteach for each option before the lesson; the options above are the start of it.
+This is a real activity from the experience (pr-l03-s4-c2), so the wording here is the wording a pupil will see.</a:t>
             </a:r>
             <a:endParaRPr lang="en-US" dirty="0"/>
           </a:p>
@@ -780,7 +788,7 @@
           <a:p>
             <a:r>
               <a:rPr lang="en-US" dirty="0"/>
-              <a:t>Use these as a settler, or as something for early finishers to read in the experience.</a:t>
+              <a:t>Make them commit to an answer on paper before they tap the star. Guessing first costs them the learning.</a:t>
             </a:r>
             <a:endParaRPr lang="en-US" dirty="0"/>
           </a:p>
@@ -868,7 +876,7 @@
           <a:p>
             <a:r>
               <a:rPr lang="en-US" dirty="0"/>
-              <a:t>Timed and silent. Mark against the answer sheet, then ask students to record their weakest area.</a:t>
+              <a:t>Use these as a settler, or as something for early finishers to read in the experience.</a:t>
             </a:r>
             <a:endParaRPr lang="en-US" dirty="0"/>
           </a:p>
@@ -956,7 +964,7 @@
           <a:p>
             <a:r>
               <a:rPr lang="en-US" dirty="0"/>
-              <a:t>Students copy their score-screen breakdown onto the worksheet, then rate themselves here.</a:t>
+              <a:t>Timed and silent. Mark against the answer sheet, then ask students to record their weakest area.</a:t>
             </a:r>
             <a:endParaRPr lang="en-US" dirty="0"/>
           </a:p>
@@ -980,6 +988,94 @@
             <a:fld id="{F7021451-1387-4CA6-816F-3879F97B5CBC}" type="slidenum">
               <a:rPr lang="en-US"/>
               <a:t>14</a:t>
+            </a:fld>
+            <a:endParaRPr lang="en-US"/>
+          </a:p>
+        </p:txBody>
+      </p:sp>
+    </p:spTree>
+    <p:extLst>
+      <p:ext uri="{BB962C8B-B14F-4D97-AF65-F5344CB8AC3E}">
+        <p14:creationId xmlns:p14="http://schemas.microsoft.com/office/powerpoint/2010/main" val="1024086991"/>
+      </p:ext>
+    </p:extLst>
+  </p:cSld>
+  <p:clrMapOvr>
+    <a:masterClrMapping/>
+  </p:clrMapOvr>
+</p:notes>
+</file>
+
+<file path=ppt/notesSlides/notesSlide15.xml><?xml version="1.0" encoding="utf-8"?>
+<p:notes xmlns:a="http://schemas.openxmlformats.org/drawingml/2006/main" xmlns:r="http://schemas.openxmlformats.org/officeDocument/2006/relationships" xmlns:p="http://schemas.openxmlformats.org/presentationml/2006/main">
+  <p:cSld>
+    <p:spTree>
+      <p:nvGrpSpPr>
+        <p:cNvPr id="1" name=""/>
+        <p:cNvGrpSpPr/>
+        <p:nvPr/>
+      </p:nvGrpSpPr>
+      <p:grpSpPr>
+        <a:xfrm>
+          <a:off x="0" y="0"/>
+          <a:ext cx="0" cy="0"/>
+          <a:chOff x="0" y="0"/>
+          <a:chExt cx="0" cy="0"/>
+        </a:xfrm>
+      </p:grpSpPr>
+      <p:sp>
+        <p:nvSpPr>
+          <p:cNvPr id="2" name="Slide Image Placeholder 1"/>
+          <p:cNvSpPr>
+            <a:spLocks noGrp="1" noRot="1" noChangeAspect="1"/>
+          </p:cNvSpPr>
+          <p:nvPr>
+            <p:ph type="sldImg"/>
+          </p:nvPr>
+        </p:nvSpPr>
+        <p:spPr/>
+      </p:sp>
+      <p:sp>
+        <p:nvSpPr>
+          <p:cNvPr id="3" name="Notes Placeholder 2"/>
+          <p:cNvSpPr>
+            <a:spLocks noGrp="1"/>
+          </p:cNvSpPr>
+          <p:nvPr>
+            <p:ph type="body" idx="1"/>
+          </p:nvPr>
+        </p:nvSpPr>
+        <p:spPr/>
+        <p:txBody>
+          <a:bodyPr/>
+          <a:lstStyle/>
+          <a:p>
+            <a:r>
+              <a:rPr lang="en-US" dirty="0"/>
+              <a:t>Students copy their score-screen breakdown onto the worksheet, then rate themselves here.</a:t>
+            </a:r>
+            <a:endParaRPr lang="en-US" dirty="0"/>
+          </a:p>
+        </p:txBody>
+      </p:sp>
+      <p:sp>
+        <p:nvSpPr>
+          <p:cNvPr id="4" name="Slide Number Placeholder 3"/>
+          <p:cNvSpPr>
+            <a:spLocks noGrp="1"/>
+          </p:cNvSpPr>
+          <p:nvPr>
+            <p:ph type="sldNum" sz="quarter" idx="10"/>
+          </p:nvPr>
+        </p:nvSpPr>
+        <p:spPr/>
+        <p:txBody>
+          <a:bodyPr/>
+          <a:lstStyle/>
+          <a:p>
+            <a:fld id="{F7021451-1387-4CA6-816F-3879F97B5CBC}" type="slidenum">
+              <a:rPr lang="en-US"/>
+              <a:t>15</a:t>
             </a:fld>
             <a:endParaRPr lang="en-US"/>
           </a:p>
@@ -2949,12 +3045,12 @@
         </p:nvSpPr>
         <p:spPr>
           <a:xfrm>
-            <a:off x="502920" y="438912"/>
-            <a:ext cx="3108960" cy="502920"/>
+            <a:off x="502920" y="457200"/>
+            <a:ext cx="1051560" cy="420624"/>
           </a:xfrm>
           <a:prstGeom prst="roundRect">
             <a:avLst>
-              <a:gd name="adj" fmla="val 18182"/>
+              <a:gd name="adj" fmla="val 21739"/>
             </a:avLst>
           </a:prstGeom>
           <a:solidFill>
@@ -2971,8 +3067,8 @@
         </p:nvSpPr>
         <p:spPr>
           <a:xfrm>
-            <a:off x="502920" y="438912"/>
-            <a:ext cx="3108960" cy="502920"/>
+            <a:off x="502920" y="457200"/>
+            <a:ext cx="1051560" cy="420624"/>
           </a:xfrm>
           <a:prstGeom prst="rect">
             <a:avLst/>
@@ -2988,7 +3084,7 @@
               <a:buNone/>
             </a:pPr>
             <a:r>
-              <a:rPr lang="en-US" sz="1300" b="1" dirty="0">
+              <a:rPr lang="en-US" sz="1200" b="1" dirty="0">
                 <a:solidFill>
                   <a:srgbClr val="101828"/>
                 </a:solidFill>
@@ -2996,9 +3092,9 @@
                 <a:ea typeface="IBM Plex Mono" pitchFamily="34" charset="-122"/>
                 <a:cs typeface="IBM Plex Mono" pitchFamily="34" charset="-120"/>
               </a:rPr>
-              <a:t>★  FINAL CHALLENGE</a:t>
-            </a:r>
-            <a:endParaRPr lang="en-US" sz="1300" dirty="0"/>
+              <a:t>CHECK</a:t>
+            </a:r>
+            <a:endParaRPr lang="en-US" sz="1200" dirty="0"/>
           </a:p>
         </p:txBody>
       </p:sp>
@@ -3010,8 +3106,8 @@
         </p:nvSpPr>
         <p:spPr>
           <a:xfrm>
-            <a:off x="502920" y="1097280"/>
-            <a:ext cx="11155680" cy="731520"/>
+            <a:off x="1737360" y="457200"/>
+            <a:ext cx="9875520" cy="420624"/>
           </a:xfrm>
           <a:prstGeom prst="rect">
             <a:avLst/>
@@ -3027,34 +3123,76 @@
               <a:buNone/>
             </a:pPr>
             <a:r>
-              <a:rPr lang="en-US" sz="3400" b="1" dirty="0">
-                <a:solidFill>
-                  <a:srgbClr val="101828"/>
+              <a:rPr lang="en-US" sz="1500" dirty="0">
+                <a:solidFill>
+                  <a:srgbClr val="667085"/>
                 </a:solidFill>
                 <a:latin typeface="IBM Plex Sans" pitchFamily="34" charset="0"/>
                 <a:ea typeface="IBM Plex Sans" pitchFamily="34" charset="-122"/>
                 <a:cs typeface="IBM Plex Sans" pitchFamily="34" charset="-120"/>
               </a:rPr>
-              <a:t>True or false</a:t>
-            </a:r>
-            <a:endParaRPr lang="en-US" sz="3400" dirty="0"/>
-          </a:p>
-        </p:txBody>
-      </p:sp>
-      <p:sp>
-        <p:nvSpPr>
-          <p:cNvPr id="8" name="Shape 6"/>
+              <a:t>Hands down. Everyone commits.</a:t>
+            </a:r>
+            <a:endParaRPr lang="en-US" sz="1500" dirty="0"/>
+          </a:p>
+        </p:txBody>
+      </p:sp>
+      <p:sp>
+        <p:nvSpPr>
+          <p:cNvPr id="8" name="Text 6"/>
+          <p:cNvSpPr txBox="1"/>
+          <p:nvPr/>
+        </p:nvSpPr>
+        <p:spPr>
+          <a:xfrm>
+            <a:off x="502920" y="1097280"/>
+            <a:ext cx="11155680" cy="914400"/>
+          </a:xfrm>
+          <a:prstGeom prst="rect">
+            <a:avLst/>
+          </a:prstGeom>
+          <a:noFill/>
+          <a:ln/>
+        </p:spPr>
+        <p:txBody>
+          <a:bodyPr wrap="square" lIns="0" tIns="0" rIns="0" bIns="0" rtlCol="0" anchor="ctr"/>
+          <a:lstStyle/>
+          <a:p>
+            <a:pPr indent="0" marL="0">
+              <a:lnSpc>
+                <a:spcPct val="115000"/>
+              </a:lnSpc>
+              <a:buNone/>
+            </a:pPr>
+            <a:r>
+              <a:rPr lang="en-US" sz="2600" b="1" dirty="0">
+                <a:solidFill>
+                  <a:srgbClr val="101828"/>
+                </a:solidFill>
+                <a:latin typeface="IBM Plex Sans" pitchFamily="34" charset="0"/>
+                <a:ea typeface="IBM Plex Sans" pitchFamily="34" charset="-122"/>
+                <a:cs typeface="IBM Plex Sans" pitchFamily="34" charset="-120"/>
+              </a:rPr>
+              <a:t>What will this program display?</a:t>
+            </a:r>
+            <a:endParaRPr lang="en-US" sz="2600" dirty="0"/>
+          </a:p>
+        </p:txBody>
+      </p:sp>
+      <p:sp>
+        <p:nvSpPr>
+          <p:cNvPr id="9" name="Shape 7"/>
           <p:cNvSpPr/>
           <p:nvPr/>
         </p:nvSpPr>
         <p:spPr>
           <a:xfrm>
-            <a:off x="502920" y="2011680"/>
-            <a:ext cx="11155680" cy="2194560"/>
+            <a:off x="502920" y="2148840"/>
+            <a:ext cx="5029200" cy="1280160"/>
           </a:xfrm>
           <a:prstGeom prst="roundRect">
             <a:avLst>
-              <a:gd name="adj" fmla="val 5000"/>
+              <a:gd name="adj" fmla="val 8571"/>
             </a:avLst>
           </a:prstGeom>
           <a:solidFill>
@@ -3062,7 +3200,7 @@
           </a:solidFill>
           <a:ln w="15875">
             <a:solidFill>
-              <a:srgbClr val="2D63FF"/>
+              <a:srgbClr val="D9DEE7"/>
             </a:solidFill>
             <a:prstDash val="solid"/>
           </a:ln>
@@ -3070,33 +3208,203 @@
       </p:sp>
       <p:sp>
         <p:nvSpPr>
-          <p:cNvPr id="9" name="Text 7"/>
-          <p:cNvSpPr txBox="1"/>
-          <p:nvPr/>
-        </p:nvSpPr>
-        <p:spPr>
-          <a:xfrm>
-            <a:off x="1005840" y="2331720"/>
-            <a:ext cx="10149840" cy="1554480"/>
-          </a:xfrm>
-          <a:prstGeom prst="rect">
-            <a:avLst/>
-          </a:prstGeom>
-          <a:noFill/>
-          <a:ln/>
-        </p:spPr>
-        <p:txBody>
-          <a:bodyPr wrap="square" lIns="0" tIns="0" rIns="0" bIns="0" rtlCol="0" anchor="ctr"/>
+          <p:cNvPr id="10" name="Text 8"/>
+          <p:cNvSpPr txBox="1"/>
+          <p:nvPr/>
+        </p:nvSpPr>
+        <p:spPr>
+          <a:xfrm>
+            <a:off x="822960" y="2350008"/>
+            <a:ext cx="4480560" cy="877824"/>
+          </a:xfrm>
+          <a:prstGeom prst="rect">
+            <a:avLst/>
+          </a:prstGeom>
+          <a:noFill/>
+          <a:ln/>
+        </p:spPr>
+        <p:txBody>
+          <a:bodyPr wrap="square" lIns="0" tIns="0" rIns="0" bIns="0" rtlCol="0" anchor="t"/>
           <a:lstStyle/>
           <a:p>
             <a:pPr indent="0" marL="0">
               <a:lnSpc>
-                <a:spcPct val="130000"/>
+                <a:spcPct val="125000"/>
               </a:lnSpc>
               <a:buNone/>
             </a:pPr>
             <a:r>
-              <a:rPr lang="en-US" sz="2200" dirty="0">
+              <a:rPr lang="en-US" sz="1500" dirty="0">
+                <a:solidFill>
+                  <a:srgbClr val="101828"/>
+                </a:solidFill>
+                <a:latin typeface="IBM Plex Mono" pitchFamily="34" charset="0"/>
+                <a:ea typeface="IBM Plex Mono" pitchFamily="34" charset="-122"/>
+                <a:cs typeface="IBM Plex Mono" pitchFamily="34" charset="-120"/>
+              </a:rPr>
+              <a:t>n = 4</a:t>
+            </a:r>
+            <a:endParaRPr lang="en-US" sz="1500" dirty="0"/>
+          </a:p>
+          <a:p>
+            <a:pPr indent="0" marL="0">
+              <a:lnSpc>
+                <a:spcPct val="125000"/>
+              </a:lnSpc>
+              <a:buNone/>
+            </a:pPr>
+            <a:r>
+              <a:rPr lang="en-US" sz="1500" dirty="0">
+                <a:solidFill>
+                  <a:srgbClr val="101828"/>
+                </a:solidFill>
+                <a:latin typeface="IBM Plex Mono" pitchFamily="34" charset="0"/>
+                <a:ea typeface="IBM Plex Mono" pitchFamily="34" charset="-122"/>
+                <a:cs typeface="IBM Plex Mono" pitchFamily="34" charset="-120"/>
+              </a:rPr>
+              <a:t>print(n == 3 or n == 4)</a:t>
+            </a:r>
+            <a:endParaRPr lang="en-US" sz="1500" dirty="0"/>
+          </a:p>
+          <a:p>
+            <a:pPr indent="0" marL="0">
+              <a:lnSpc>
+                <a:spcPct val="125000"/>
+              </a:lnSpc>
+              <a:buNone/>
+            </a:pPr>
+            <a:r>
+              <a:rPr lang="en-US" sz="1500" dirty="0">
+                <a:solidFill>
+                  <a:srgbClr val="101828"/>
+                </a:solidFill>
+                <a:latin typeface="IBM Plex Mono" pitchFamily="34" charset="0"/>
+                <a:ea typeface="IBM Plex Mono" pitchFamily="34" charset="-122"/>
+                <a:cs typeface="IBM Plex Mono" pitchFamily="34" charset="-120"/>
+              </a:rPr>
+              <a:t>print(n == 3 or n == 7)</a:t>
+            </a:r>
+            <a:endParaRPr lang="en-US" sz="1500" dirty="0"/>
+          </a:p>
+        </p:txBody>
+      </p:sp>
+      <p:sp>
+        <p:nvSpPr>
+          <p:cNvPr id="11" name="Shape 9"/>
+          <p:cNvSpPr/>
+          <p:nvPr/>
+        </p:nvSpPr>
+        <p:spPr>
+          <a:xfrm>
+            <a:off x="5806440" y="2148840"/>
+            <a:ext cx="5852160" cy="731520"/>
+          </a:xfrm>
+          <a:prstGeom prst="roundRect">
+            <a:avLst>
+              <a:gd name="adj" fmla="val 15000"/>
+            </a:avLst>
+          </a:prstGeom>
+          <a:solidFill>
+            <a:srgbClr val="FFFFFF"/>
+          </a:solidFill>
+          <a:ln w="15875">
+            <a:solidFill>
+              <a:srgbClr val="D9DEE7"/>
+            </a:solidFill>
+            <a:prstDash val="solid"/>
+          </a:ln>
+        </p:spPr>
+      </p:sp>
+      <p:sp>
+        <p:nvSpPr>
+          <p:cNvPr id="12" name="Shape 10"/>
+          <p:cNvSpPr/>
+          <p:nvPr/>
+        </p:nvSpPr>
+        <p:spPr>
+          <a:xfrm>
+            <a:off x="6080760" y="2295144"/>
+            <a:ext cx="438912" cy="438912"/>
+          </a:xfrm>
+          <a:prstGeom prst="roundRect">
+            <a:avLst>
+              <a:gd name="adj" fmla="val 20833"/>
+            </a:avLst>
+          </a:prstGeom>
+          <a:solidFill>
+            <a:srgbClr val="EEF2FB"/>
+          </a:solidFill>
+          <a:ln/>
+        </p:spPr>
+      </p:sp>
+      <p:sp>
+        <p:nvSpPr>
+          <p:cNvPr id="13" name="Text 11"/>
+          <p:cNvSpPr txBox="1"/>
+          <p:nvPr/>
+        </p:nvSpPr>
+        <p:spPr>
+          <a:xfrm>
+            <a:off x="6080760" y="2295144"/>
+            <a:ext cx="438912" cy="438912"/>
+          </a:xfrm>
+          <a:prstGeom prst="rect">
+            <a:avLst/>
+          </a:prstGeom>
+          <a:noFill/>
+          <a:ln/>
+        </p:spPr>
+        <p:txBody>
+          <a:bodyPr wrap="square" lIns="0" tIns="0" rIns="0" bIns="0" rtlCol="0" anchor="ctr"/>
+          <a:lstStyle/>
+          <a:p>
+            <a:pPr algn="ctr" indent="0" marL="0">
+              <a:buNone/>
+            </a:pPr>
+            <a:r>
+              <a:rPr lang="en-US" sz="1300" b="1" dirty="0">
+                <a:solidFill>
+                  <a:srgbClr val="2D63FF"/>
+                </a:solidFill>
+                <a:latin typeface="IBM Plex Mono" pitchFamily="34" charset="0"/>
+                <a:ea typeface="IBM Plex Mono" pitchFamily="34" charset="-122"/>
+                <a:cs typeface="IBM Plex Mono" pitchFamily="34" charset="-120"/>
+              </a:rPr>
+              <a:t>A</a:t>
+            </a:r>
+            <a:endParaRPr lang="en-US" sz="1300" dirty="0"/>
+          </a:p>
+        </p:txBody>
+      </p:sp>
+      <p:sp>
+        <p:nvSpPr>
+          <p:cNvPr id="14" name="Text 12"/>
+          <p:cNvSpPr txBox="1"/>
+          <p:nvPr/>
+        </p:nvSpPr>
+        <p:spPr>
+          <a:xfrm>
+            <a:off x="6720840" y="2148840"/>
+            <a:ext cx="4754880" cy="731520"/>
+          </a:xfrm>
+          <a:prstGeom prst="rect">
+            <a:avLst/>
+          </a:prstGeom>
+          <a:noFill/>
+          <a:ln/>
+        </p:spPr>
+        <p:txBody>
+          <a:bodyPr wrap="square" lIns="0" tIns="0" rIns="0" bIns="0" rtlCol="0" anchor="ctr"/>
+          <a:lstStyle/>
+          <a:p>
+            <a:pPr indent="0" marL="0">
+              <a:lnSpc>
+                <a:spcPct val="115000"/>
+              </a:lnSpc>
+              <a:buNone/>
+            </a:pPr>
+            <a:r>
+              <a:rPr lang="en-US" sz="1700" dirty="0">
                 <a:solidFill>
                   <a:srgbClr val="101828"/>
                 </a:solidFill>
@@ -3104,48 +3412,329 @@
                 <a:ea typeface="IBM Plex Sans" pitchFamily="34" charset="-122"/>
                 <a:cs typeface="IBM Plex Sans" pitchFamily="34" charset="-120"/>
               </a:rPr>
-              <a:t>Three variables hold these values: wind is 15, vis is 8 and alarm is False. Tap the star and decide whether each condition is True or False.</a:t>
-            </a:r>
-            <a:endParaRPr lang="en-US" sz="2200" dirty="0"/>
-          </a:p>
-        </p:txBody>
-      </p:sp>
-      <p:sp>
-        <p:nvSpPr>
-          <p:cNvPr id="10" name="Text 8"/>
-          <p:cNvSpPr txBox="1"/>
-          <p:nvPr/>
-        </p:nvSpPr>
-        <p:spPr>
-          <a:xfrm>
-            <a:off x="502920" y="4526280"/>
-            <a:ext cx="11155680" cy="457200"/>
-          </a:xfrm>
-          <a:prstGeom prst="rect">
-            <a:avLst/>
-          </a:prstGeom>
-          <a:noFill/>
-          <a:ln/>
-        </p:spPr>
-        <p:txBody>
-          <a:bodyPr wrap="square" lIns="0" tIns="0" rIns="0" bIns="0" rtlCol="0" anchor="ctr"/>
-          <a:lstStyle/>
+              <a:t>True</a:t>
+            </a:r>
+            <a:endParaRPr lang="en-US" sz="1700" dirty="0"/>
+          </a:p>
           <a:p>
             <a:pPr indent="0" marL="0">
-              <a:buNone/>
-            </a:pPr>
-            <a:r>
-              <a:rPr lang="en-US" sz="1600" dirty="0">
-                <a:solidFill>
-                  <a:srgbClr val="667085"/>
+              <a:lnSpc>
+                <a:spcPct val="115000"/>
+              </a:lnSpc>
+              <a:buNone/>
+            </a:pPr>
+            <a:r>
+              <a:rPr lang="en-US" sz="1700" dirty="0">
+                <a:solidFill>
+                  <a:srgbClr val="101828"/>
                 </a:solidFill>
                 <a:latin typeface="IBM Plex Sans" pitchFamily="34" charset="0"/>
                 <a:ea typeface="IBM Plex Sans" pitchFamily="34" charset="-122"/>
                 <a:cs typeface="IBM Plex Sans" pitchFamily="34" charset="-120"/>
               </a:rPr>
-              <a:t>Predict on paper first, then look down and test it.</a:t>
-            </a:r>
-            <a:endParaRPr lang="en-US" sz="1600" dirty="0"/>
+              <a:t>True</a:t>
+            </a:r>
+            <a:endParaRPr lang="en-US" sz="1700" dirty="0"/>
+          </a:p>
+        </p:txBody>
+      </p:sp>
+      <p:sp>
+        <p:nvSpPr>
+          <p:cNvPr id="15" name="Shape 13"/>
+          <p:cNvSpPr/>
+          <p:nvPr/>
+        </p:nvSpPr>
+        <p:spPr>
+          <a:xfrm>
+            <a:off x="5806440" y="3017520"/>
+            <a:ext cx="5852160" cy="731520"/>
+          </a:xfrm>
+          <a:prstGeom prst="roundRect">
+            <a:avLst>
+              <a:gd name="adj" fmla="val 15000"/>
+            </a:avLst>
+          </a:prstGeom>
+          <a:solidFill>
+            <a:srgbClr val="FFFFFF"/>
+          </a:solidFill>
+          <a:ln w="15875">
+            <a:solidFill>
+              <a:srgbClr val="D9DEE7"/>
+            </a:solidFill>
+            <a:prstDash val="solid"/>
+          </a:ln>
+        </p:spPr>
+      </p:sp>
+      <p:sp>
+        <p:nvSpPr>
+          <p:cNvPr id="16" name="Shape 14"/>
+          <p:cNvSpPr/>
+          <p:nvPr/>
+        </p:nvSpPr>
+        <p:spPr>
+          <a:xfrm>
+            <a:off x="6080760" y="3163824"/>
+            <a:ext cx="438912" cy="438912"/>
+          </a:xfrm>
+          <a:prstGeom prst="roundRect">
+            <a:avLst>
+              <a:gd name="adj" fmla="val 20833"/>
+            </a:avLst>
+          </a:prstGeom>
+          <a:solidFill>
+            <a:srgbClr val="EEF2FB"/>
+          </a:solidFill>
+          <a:ln/>
+        </p:spPr>
+      </p:sp>
+      <p:sp>
+        <p:nvSpPr>
+          <p:cNvPr id="17" name="Text 15"/>
+          <p:cNvSpPr txBox="1"/>
+          <p:nvPr/>
+        </p:nvSpPr>
+        <p:spPr>
+          <a:xfrm>
+            <a:off x="6080760" y="3163824"/>
+            <a:ext cx="438912" cy="438912"/>
+          </a:xfrm>
+          <a:prstGeom prst="rect">
+            <a:avLst/>
+          </a:prstGeom>
+          <a:noFill/>
+          <a:ln/>
+        </p:spPr>
+        <p:txBody>
+          <a:bodyPr wrap="square" lIns="0" tIns="0" rIns="0" bIns="0" rtlCol="0" anchor="ctr"/>
+          <a:lstStyle/>
+          <a:p>
+            <a:pPr algn="ctr" indent="0" marL="0">
+              <a:buNone/>
+            </a:pPr>
+            <a:r>
+              <a:rPr lang="en-US" sz="1300" b="1" dirty="0">
+                <a:solidFill>
+                  <a:srgbClr val="2D63FF"/>
+                </a:solidFill>
+                <a:latin typeface="IBM Plex Mono" pitchFamily="34" charset="0"/>
+                <a:ea typeface="IBM Plex Mono" pitchFamily="34" charset="-122"/>
+                <a:cs typeface="IBM Plex Mono" pitchFamily="34" charset="-120"/>
+              </a:rPr>
+              <a:t>B</a:t>
+            </a:r>
+            <a:endParaRPr lang="en-US" sz="1300" dirty="0"/>
+          </a:p>
+        </p:txBody>
+      </p:sp>
+      <p:sp>
+        <p:nvSpPr>
+          <p:cNvPr id="18" name="Text 16"/>
+          <p:cNvSpPr txBox="1"/>
+          <p:nvPr/>
+        </p:nvSpPr>
+        <p:spPr>
+          <a:xfrm>
+            <a:off x="6720840" y="3017520"/>
+            <a:ext cx="4754880" cy="731520"/>
+          </a:xfrm>
+          <a:prstGeom prst="rect">
+            <a:avLst/>
+          </a:prstGeom>
+          <a:noFill/>
+          <a:ln/>
+        </p:spPr>
+        <p:txBody>
+          <a:bodyPr wrap="square" lIns="0" tIns="0" rIns="0" bIns="0" rtlCol="0" anchor="ctr"/>
+          <a:lstStyle/>
+          <a:p>
+            <a:pPr indent="0" marL="0">
+              <a:lnSpc>
+                <a:spcPct val="115000"/>
+              </a:lnSpc>
+              <a:buNone/>
+            </a:pPr>
+            <a:r>
+              <a:rPr lang="en-US" sz="1700" dirty="0">
+                <a:solidFill>
+                  <a:srgbClr val="101828"/>
+                </a:solidFill>
+                <a:latin typeface="IBM Plex Sans" pitchFamily="34" charset="0"/>
+                <a:ea typeface="IBM Plex Sans" pitchFamily="34" charset="-122"/>
+                <a:cs typeface="IBM Plex Sans" pitchFamily="34" charset="-120"/>
+              </a:rPr>
+              <a:t>True</a:t>
+            </a:r>
+            <a:endParaRPr lang="en-US" sz="1700" dirty="0"/>
+          </a:p>
+          <a:p>
+            <a:pPr indent="0" marL="0">
+              <a:lnSpc>
+                <a:spcPct val="115000"/>
+              </a:lnSpc>
+              <a:buNone/>
+            </a:pPr>
+            <a:r>
+              <a:rPr lang="en-US" sz="1700" dirty="0">
+                <a:solidFill>
+                  <a:srgbClr val="101828"/>
+                </a:solidFill>
+                <a:latin typeface="IBM Plex Sans" pitchFamily="34" charset="0"/>
+                <a:ea typeface="IBM Plex Sans" pitchFamily="34" charset="-122"/>
+                <a:cs typeface="IBM Plex Sans" pitchFamily="34" charset="-120"/>
+              </a:rPr>
+              <a:t>False</a:t>
+            </a:r>
+            <a:endParaRPr lang="en-US" sz="1700" dirty="0"/>
+          </a:p>
+        </p:txBody>
+      </p:sp>
+      <p:sp>
+        <p:nvSpPr>
+          <p:cNvPr id="19" name="Shape 17"/>
+          <p:cNvSpPr/>
+          <p:nvPr/>
+        </p:nvSpPr>
+        <p:spPr>
+          <a:xfrm>
+            <a:off x="5806440" y="3886200"/>
+            <a:ext cx="5852160" cy="731520"/>
+          </a:xfrm>
+          <a:prstGeom prst="roundRect">
+            <a:avLst>
+              <a:gd name="adj" fmla="val 15000"/>
+            </a:avLst>
+          </a:prstGeom>
+          <a:solidFill>
+            <a:srgbClr val="FFFFFF"/>
+          </a:solidFill>
+          <a:ln w="15875">
+            <a:solidFill>
+              <a:srgbClr val="D9DEE7"/>
+            </a:solidFill>
+            <a:prstDash val="solid"/>
+          </a:ln>
+        </p:spPr>
+      </p:sp>
+      <p:sp>
+        <p:nvSpPr>
+          <p:cNvPr id="20" name="Shape 18"/>
+          <p:cNvSpPr/>
+          <p:nvPr/>
+        </p:nvSpPr>
+        <p:spPr>
+          <a:xfrm>
+            <a:off x="6080760" y="4032504"/>
+            <a:ext cx="438912" cy="438912"/>
+          </a:xfrm>
+          <a:prstGeom prst="roundRect">
+            <a:avLst>
+              <a:gd name="adj" fmla="val 20833"/>
+            </a:avLst>
+          </a:prstGeom>
+          <a:solidFill>
+            <a:srgbClr val="EEF2FB"/>
+          </a:solidFill>
+          <a:ln/>
+        </p:spPr>
+      </p:sp>
+      <p:sp>
+        <p:nvSpPr>
+          <p:cNvPr id="21" name="Text 19"/>
+          <p:cNvSpPr txBox="1"/>
+          <p:nvPr/>
+        </p:nvSpPr>
+        <p:spPr>
+          <a:xfrm>
+            <a:off x="6080760" y="4032504"/>
+            <a:ext cx="438912" cy="438912"/>
+          </a:xfrm>
+          <a:prstGeom prst="rect">
+            <a:avLst/>
+          </a:prstGeom>
+          <a:noFill/>
+          <a:ln/>
+        </p:spPr>
+        <p:txBody>
+          <a:bodyPr wrap="square" lIns="0" tIns="0" rIns="0" bIns="0" rtlCol="0" anchor="ctr"/>
+          <a:lstStyle/>
+          <a:p>
+            <a:pPr algn="ctr" indent="0" marL="0">
+              <a:buNone/>
+            </a:pPr>
+            <a:r>
+              <a:rPr lang="en-US" sz="1300" b="1" dirty="0">
+                <a:solidFill>
+                  <a:srgbClr val="2D63FF"/>
+                </a:solidFill>
+                <a:latin typeface="IBM Plex Mono" pitchFamily="34" charset="0"/>
+                <a:ea typeface="IBM Plex Mono" pitchFamily="34" charset="-122"/>
+                <a:cs typeface="IBM Plex Mono" pitchFamily="34" charset="-120"/>
+              </a:rPr>
+              <a:t>C</a:t>
+            </a:r>
+            <a:endParaRPr lang="en-US" sz="1300" dirty="0"/>
+          </a:p>
+        </p:txBody>
+      </p:sp>
+      <p:sp>
+        <p:nvSpPr>
+          <p:cNvPr id="22" name="Text 20"/>
+          <p:cNvSpPr txBox="1"/>
+          <p:nvPr/>
+        </p:nvSpPr>
+        <p:spPr>
+          <a:xfrm>
+            <a:off x="6720840" y="3886200"/>
+            <a:ext cx="4754880" cy="731520"/>
+          </a:xfrm>
+          <a:prstGeom prst="rect">
+            <a:avLst/>
+          </a:prstGeom>
+          <a:noFill/>
+          <a:ln/>
+        </p:spPr>
+        <p:txBody>
+          <a:bodyPr wrap="square" lIns="0" tIns="0" rIns="0" bIns="0" rtlCol="0" anchor="ctr"/>
+          <a:lstStyle/>
+          <a:p>
+            <a:pPr indent="0" marL="0">
+              <a:lnSpc>
+                <a:spcPct val="115000"/>
+              </a:lnSpc>
+              <a:buNone/>
+            </a:pPr>
+            <a:r>
+              <a:rPr lang="en-US" sz="1700" dirty="0">
+                <a:solidFill>
+                  <a:srgbClr val="101828"/>
+                </a:solidFill>
+                <a:latin typeface="IBM Plex Sans" pitchFamily="34" charset="0"/>
+                <a:ea typeface="IBM Plex Sans" pitchFamily="34" charset="-122"/>
+                <a:cs typeface="IBM Plex Sans" pitchFamily="34" charset="-120"/>
+              </a:rPr>
+              <a:t>False</a:t>
+            </a:r>
+            <a:endParaRPr lang="en-US" sz="1700" dirty="0"/>
+          </a:p>
+          <a:p>
+            <a:pPr indent="0" marL="0">
+              <a:lnSpc>
+                <a:spcPct val="115000"/>
+              </a:lnSpc>
+              <a:buNone/>
+            </a:pPr>
+            <a:r>
+              <a:rPr lang="en-US" sz="1700" dirty="0">
+                <a:solidFill>
+                  <a:srgbClr val="101828"/>
+                </a:solidFill>
+                <a:latin typeface="IBM Plex Sans" pitchFamily="34" charset="0"/>
+                <a:ea typeface="IBM Plex Sans" pitchFamily="34" charset="-122"/>
+                <a:cs typeface="IBM Plex Sans" pitchFamily="34" charset="-120"/>
+              </a:rPr>
+              <a:t>True</a:t>
+            </a:r>
+            <a:endParaRPr lang="en-US" sz="1700" dirty="0"/>
           </a:p>
         </p:txBody>
       </p:sp>
@@ -3281,14 +3870,75 @@
       </p:sp>
       <p:sp>
         <p:nvSpPr>
-          <p:cNvPr id="5" name="Text 3"/>
-          <p:cNvSpPr txBox="1"/>
-          <p:nvPr/>
-        </p:nvSpPr>
-        <p:spPr>
-          <a:xfrm>
-            <a:off x="502920" y="411480"/>
-            <a:ext cx="11155680" cy="777240"/>
+          <p:cNvPr id="5" name="Shape 3"/>
+          <p:cNvSpPr/>
+          <p:nvPr/>
+        </p:nvSpPr>
+        <p:spPr>
+          <a:xfrm>
+            <a:off x="502920" y="438912"/>
+            <a:ext cx="3108960" cy="502920"/>
+          </a:xfrm>
+          <a:prstGeom prst="roundRect">
+            <a:avLst>
+              <a:gd name="adj" fmla="val 18182"/>
+            </a:avLst>
+          </a:prstGeom>
+          <a:solidFill>
+            <a:srgbClr val="F4B942"/>
+          </a:solidFill>
+          <a:ln/>
+        </p:spPr>
+      </p:sp>
+      <p:sp>
+        <p:nvSpPr>
+          <p:cNvPr id="6" name="Text 4"/>
+          <p:cNvSpPr txBox="1"/>
+          <p:nvPr/>
+        </p:nvSpPr>
+        <p:spPr>
+          <a:xfrm>
+            <a:off x="502920" y="438912"/>
+            <a:ext cx="3108960" cy="502920"/>
+          </a:xfrm>
+          <a:prstGeom prst="rect">
+            <a:avLst/>
+          </a:prstGeom>
+          <a:noFill/>
+          <a:ln/>
+        </p:spPr>
+        <p:txBody>
+          <a:bodyPr wrap="square" lIns="0" tIns="0" rIns="0" bIns="0" rtlCol="0" anchor="ctr"/>
+          <a:lstStyle/>
+          <a:p>
+            <a:pPr algn="ctr" indent="0" marL="0">
+              <a:buNone/>
+            </a:pPr>
+            <a:r>
+              <a:rPr lang="en-US" sz="1300" b="1" dirty="0">
+                <a:solidFill>
+                  <a:srgbClr val="101828"/>
+                </a:solidFill>
+                <a:latin typeface="IBM Plex Mono" pitchFamily="34" charset="0"/>
+                <a:ea typeface="IBM Plex Mono" pitchFamily="34" charset="-122"/>
+                <a:cs typeface="IBM Plex Mono" pitchFamily="34" charset="-120"/>
+              </a:rPr>
+              <a:t>★  FINAL CHALLENGE</a:t>
+            </a:r>
+            <a:endParaRPr lang="en-US" sz="1300" dirty="0"/>
+          </a:p>
+        </p:txBody>
+      </p:sp>
+      <p:sp>
+        <p:nvSpPr>
+          <p:cNvPr id="7" name="Text 5"/>
+          <p:cNvSpPr txBox="1"/>
+          <p:nvPr/>
+        </p:nvSpPr>
+        <p:spPr>
+          <a:xfrm>
+            <a:off x="502920" y="1097280"/>
+            <a:ext cx="11155680" cy="731520"/>
           </a:xfrm>
           <a:prstGeom prst="rect">
             <a:avLst/>
@@ -3304,7 +3954,7 @@
               <a:buNone/>
             </a:pPr>
             <a:r>
-              <a:rPr lang="en-US" sz="3200" b="1" dirty="0">
+              <a:rPr lang="en-US" sz="3400" b="1" dirty="0">
                 <a:solidFill>
                   <a:srgbClr val="101828"/>
                 </a:solidFill>
@@ -3312,65 +3962,26 @@
                 <a:ea typeface="IBM Plex Sans" pitchFamily="34" charset="-122"/>
                 <a:cs typeface="IBM Plex Sans" pitchFamily="34" charset="-120"/>
               </a:rPr>
-              <a:t>Worth knowing</a:t>
-            </a:r>
-            <a:endParaRPr lang="en-US" sz="3200" dirty="0"/>
-          </a:p>
-        </p:txBody>
-      </p:sp>
-      <p:sp>
-        <p:nvSpPr>
-          <p:cNvPr id="6" name="Text 4"/>
-          <p:cNvSpPr txBox="1"/>
-          <p:nvPr/>
-        </p:nvSpPr>
-        <p:spPr>
-          <a:xfrm>
-            <a:off x="502920" y="1170432"/>
-            <a:ext cx="11155680" cy="411480"/>
-          </a:xfrm>
-          <a:prstGeom prst="rect">
-            <a:avLst/>
-          </a:prstGeom>
-          <a:noFill/>
-          <a:ln/>
-        </p:spPr>
-        <p:txBody>
-          <a:bodyPr wrap="square" lIns="0" tIns="0" rIns="0" bIns="0" rtlCol="0" anchor="ctr"/>
-          <a:lstStyle/>
-          <a:p>
-            <a:pPr indent="0" marL="0">
-              <a:buNone/>
-            </a:pPr>
-            <a:r>
-              <a:rPr lang="en-US" sz="1500" dirty="0">
-                <a:solidFill>
-                  <a:srgbClr val="667085"/>
-                </a:solidFill>
-                <a:latin typeface="IBM Plex Sans" pitchFamily="34" charset="0"/>
-                <a:ea typeface="IBM Plex Sans" pitchFamily="34" charset="-122"/>
-                <a:cs typeface="IBM Plex Sans" pitchFamily="34" charset="-120"/>
-              </a:rPr>
-              <a:t>The information markers dotted around the room</a:t>
-            </a:r>
-            <a:endParaRPr lang="en-US" sz="1500" dirty="0"/>
-          </a:p>
-        </p:txBody>
-      </p:sp>
-      <p:sp>
-        <p:nvSpPr>
-          <p:cNvPr id="7" name="Shape 5"/>
+              <a:t>True or false</a:t>
+            </a:r>
+            <a:endParaRPr lang="en-US" sz="3400" dirty="0"/>
+          </a:p>
+        </p:txBody>
+      </p:sp>
+      <p:sp>
+        <p:nvSpPr>
+          <p:cNvPr id="8" name="Shape 6"/>
           <p:cNvSpPr/>
           <p:nvPr/>
         </p:nvSpPr>
         <p:spPr>
           <a:xfrm>
-            <a:off x="502920" y="1828800"/>
-            <a:ext cx="5394960" cy="1737360"/>
+            <a:off x="502920" y="2011680"/>
+            <a:ext cx="11155680" cy="2194560"/>
           </a:xfrm>
           <a:prstGeom prst="roundRect">
             <a:avLst>
-              <a:gd name="adj" fmla="val 6316"/>
+              <a:gd name="adj" fmla="val 5000"/>
             </a:avLst>
           </a:prstGeom>
           <a:solidFill>
@@ -3386,14 +3997,14 @@
       </p:sp>
       <p:sp>
         <p:nvSpPr>
-          <p:cNvPr id="8" name="Text 6"/>
-          <p:cNvSpPr txBox="1"/>
-          <p:nvPr/>
-        </p:nvSpPr>
-        <p:spPr>
-          <a:xfrm>
-            <a:off x="822960" y="2011680"/>
-            <a:ext cx="4754880" cy="365760"/>
+          <p:cNvPr id="9" name="Text 7"/>
+          <p:cNvSpPr txBox="1"/>
+          <p:nvPr/>
+        </p:nvSpPr>
+        <p:spPr>
+          <a:xfrm>
+            <a:off x="1005840" y="2331720"/>
+            <a:ext cx="10149840" cy="1554480"/>
           </a:xfrm>
           <a:prstGeom prst="rect">
             <a:avLst/>
@@ -3406,52 +4017,52 @@
           <a:lstStyle/>
           <a:p>
             <a:pPr indent="0" marL="0">
-              <a:buNone/>
-            </a:pPr>
-            <a:r>
-              <a:rPr lang="en-US" sz="1600" b="1" dirty="0">
-                <a:solidFill>
-                  <a:srgbClr val="2D63FF"/>
+              <a:lnSpc>
+                <a:spcPct val="130000"/>
+              </a:lnSpc>
+              <a:buNone/>
+            </a:pPr>
+            <a:r>
+              <a:rPr lang="en-US" sz="2200" dirty="0">
+                <a:solidFill>
+                  <a:srgbClr val="101828"/>
                 </a:solidFill>
                 <a:latin typeface="IBM Plex Sans" pitchFamily="34" charset="0"/>
                 <a:ea typeface="IBM Plex Sans" pitchFamily="34" charset="-122"/>
                 <a:cs typeface="IBM Plex Sans" pitchFamily="34" charset="-120"/>
               </a:rPr>
-              <a:t>One = or two</a:t>
-            </a:r>
-            <a:endParaRPr lang="en-US" sz="1600" dirty="0"/>
-          </a:p>
-        </p:txBody>
-      </p:sp>
-      <p:sp>
-        <p:nvSpPr>
-          <p:cNvPr id="9" name="Text 7"/>
-          <p:cNvSpPr txBox="1"/>
-          <p:nvPr/>
-        </p:nvSpPr>
-        <p:spPr>
-          <a:xfrm>
-            <a:off x="822960" y="2395728"/>
-            <a:ext cx="4754880" cy="1005840"/>
-          </a:xfrm>
-          <a:prstGeom prst="rect">
-            <a:avLst/>
-          </a:prstGeom>
-          <a:noFill/>
-          <a:ln/>
-        </p:spPr>
-        <p:txBody>
-          <a:bodyPr wrap="square" lIns="0" tIns="0" rIns="0" bIns="0" rtlCol="0" anchor="t"/>
+              <a:t>Three variables hold these values: wind is 15, vis is 8 and alarm is False. Tap the star and decide whether each condition is True or False.</a:t>
+            </a:r>
+            <a:endParaRPr lang="en-US" sz="2200" dirty="0"/>
+          </a:p>
+        </p:txBody>
+      </p:sp>
+      <p:sp>
+        <p:nvSpPr>
+          <p:cNvPr id="10" name="Text 8"/>
+          <p:cNvSpPr txBox="1"/>
+          <p:nvPr/>
+        </p:nvSpPr>
+        <p:spPr>
+          <a:xfrm>
+            <a:off x="502920" y="4526280"/>
+            <a:ext cx="11155680" cy="457200"/>
+          </a:xfrm>
+          <a:prstGeom prst="rect">
+            <a:avLst/>
+          </a:prstGeom>
+          <a:noFill/>
+          <a:ln/>
+        </p:spPr>
+        <p:txBody>
+          <a:bodyPr wrap="square" lIns="0" tIns="0" rIns="0" bIns="0" rtlCol="0" anchor="ctr"/>
           <a:lstStyle/>
           <a:p>
             <a:pPr indent="0" marL="0">
-              <a:lnSpc>
-                <a:spcPct val="120000"/>
-              </a:lnSpc>
-              <a:buNone/>
-            </a:pPr>
-            <a:r>
-              <a:rPr lang="en-US" sz="1300" dirty="0">
+              <a:buNone/>
+            </a:pPr>
+            <a:r>
+              <a:rPr lang="en-US" sz="1600" dirty="0">
                 <a:solidFill>
                   <a:srgbClr val="667085"/>
                 </a:solidFill>
@@ -3459,333 +4070,9 @@
                 <a:ea typeface="IBM Plex Sans" pitchFamily="34" charset="-122"/>
                 <a:cs typeface="IBM Plex Sans" pitchFamily="34" charset="-120"/>
               </a:rPr>
-              <a:t>A single = stores a value and == compares two. Mixing them up is one of the first bugs every programmer meets.</a:t>
-            </a:r>
-            <a:endParaRPr lang="en-US" sz="1300" dirty="0"/>
-          </a:p>
-        </p:txBody>
-      </p:sp>
-      <p:sp>
-        <p:nvSpPr>
-          <p:cNvPr id="10" name="Shape 8"/>
-          <p:cNvSpPr/>
-          <p:nvPr/>
-        </p:nvSpPr>
-        <p:spPr>
-          <a:xfrm>
-            <a:off x="6217920" y="1828800"/>
-            <a:ext cx="5394960" cy="1737360"/>
-          </a:xfrm>
-          <a:prstGeom prst="roundRect">
-            <a:avLst>
-              <a:gd name="adj" fmla="val 6316"/>
-            </a:avLst>
-          </a:prstGeom>
-          <a:solidFill>
-            <a:srgbClr val="FFFFFF"/>
-          </a:solidFill>
-          <a:ln w="15875">
-            <a:solidFill>
-              <a:srgbClr val="08A6A6"/>
-            </a:solidFill>
-            <a:prstDash val="solid"/>
-          </a:ln>
-        </p:spPr>
-      </p:sp>
-      <p:sp>
-        <p:nvSpPr>
-          <p:cNvPr id="11" name="Text 9"/>
-          <p:cNvSpPr txBox="1"/>
-          <p:nvPr/>
-        </p:nvSpPr>
-        <p:spPr>
-          <a:xfrm>
-            <a:off x="6537960" y="2011680"/>
-            <a:ext cx="4754880" cy="365760"/>
-          </a:xfrm>
-          <a:prstGeom prst="rect">
-            <a:avLst/>
-          </a:prstGeom>
-          <a:noFill/>
-          <a:ln/>
-        </p:spPr>
-        <p:txBody>
-          <a:bodyPr wrap="square" lIns="0" tIns="0" rIns="0" bIns="0" rtlCol="0" anchor="ctr"/>
-          <a:lstStyle/>
-          <a:p>
-            <a:pPr indent="0" marL="0">
-              <a:buNone/>
-            </a:pPr>
-            <a:r>
-              <a:rPr lang="en-US" sz="1600" b="1" dirty="0">
-                <a:solidFill>
-                  <a:srgbClr val="08A6A6"/>
-                </a:solidFill>
-                <a:latin typeface="IBM Plex Sans" pitchFamily="34" charset="0"/>
-                <a:ea typeface="IBM Plex Sans" pitchFamily="34" charset="-122"/>
-                <a:cs typeface="IBM Plex Sans" pitchFamily="34" charset="-120"/>
-              </a:rPr>
-              <a:t>No switch here</a:t>
+              <a:t>Predict on paper first, then look down and test it.</a:t>
             </a:r>
             <a:endParaRPr lang="en-US" sz="1600" dirty="0"/>
-          </a:p>
-        </p:txBody>
-      </p:sp>
-      <p:sp>
-        <p:nvSpPr>
-          <p:cNvPr id="12" name="Text 10"/>
-          <p:cNvSpPr txBox="1"/>
-          <p:nvPr/>
-        </p:nvSpPr>
-        <p:spPr>
-          <a:xfrm>
-            <a:off x="6537960" y="2395728"/>
-            <a:ext cx="4754880" cy="1005840"/>
-          </a:xfrm>
-          <a:prstGeom prst="rect">
-            <a:avLst/>
-          </a:prstGeom>
-          <a:noFill/>
-          <a:ln/>
-        </p:spPr>
-        <p:txBody>
-          <a:bodyPr wrap="square" lIns="0" tIns="0" rIns="0" bIns="0" rtlCol="0" anchor="t"/>
-          <a:lstStyle/>
-          <a:p>
-            <a:pPr indent="0" marL="0">
-              <a:lnSpc>
-                <a:spcPct val="120000"/>
-              </a:lnSpc>
-              <a:buNone/>
-            </a:pPr>
-            <a:r>
-              <a:rPr lang="en-US" sz="1300" dirty="0">
-                <a:solidFill>
-                  <a:srgbClr val="667085"/>
-                </a:solidFill>
-                <a:latin typeface="IBM Plex Sans" pitchFamily="34" charset="0"/>
-                <a:ea typeface="IBM Plex Sans" pitchFamily="34" charset="-122"/>
-                <a:cs typeface="IBM Plex Sans" pitchFamily="34" charset="-120"/>
-              </a:rPr>
-              <a:t>Some languages have a switch statement for choosing between many options. Python does the same job with elif.</a:t>
-            </a:r>
-            <a:endParaRPr lang="en-US" sz="1300" dirty="0"/>
-          </a:p>
-        </p:txBody>
-      </p:sp>
-      <p:sp>
-        <p:nvSpPr>
-          <p:cNvPr id="13" name="Shape 11"/>
-          <p:cNvSpPr/>
-          <p:nvPr/>
-        </p:nvSpPr>
-        <p:spPr>
-          <a:xfrm>
-            <a:off x="502920" y="3794760"/>
-            <a:ext cx="5394960" cy="1737360"/>
-          </a:xfrm>
-          <a:prstGeom prst="roundRect">
-            <a:avLst>
-              <a:gd name="adj" fmla="val 6316"/>
-            </a:avLst>
-          </a:prstGeom>
-          <a:solidFill>
-            <a:srgbClr val="FFFFFF"/>
-          </a:solidFill>
-          <a:ln w="15875">
-            <a:solidFill>
-              <a:srgbClr val="2D63FF"/>
-            </a:solidFill>
-            <a:prstDash val="solid"/>
-          </a:ln>
-        </p:spPr>
-      </p:sp>
-      <p:sp>
-        <p:nvSpPr>
-          <p:cNvPr id="14" name="Text 12"/>
-          <p:cNvSpPr txBox="1"/>
-          <p:nvPr/>
-        </p:nvSpPr>
-        <p:spPr>
-          <a:xfrm>
-            <a:off x="822960" y="3977640"/>
-            <a:ext cx="4754880" cy="365760"/>
-          </a:xfrm>
-          <a:prstGeom prst="rect">
-            <a:avLst/>
-          </a:prstGeom>
-          <a:noFill/>
-          <a:ln/>
-        </p:spPr>
-        <p:txBody>
-          <a:bodyPr wrap="square" lIns="0" tIns="0" rIns="0" bIns="0" rtlCol="0" anchor="ctr"/>
-          <a:lstStyle/>
-          <a:p>
-            <a:pPr indent="0" marL="0">
-              <a:buNone/>
-            </a:pPr>
-            <a:r>
-              <a:rPr lang="en-US" sz="1600" b="1" dirty="0">
-                <a:solidFill>
-                  <a:srgbClr val="2D63FF"/>
-                </a:solidFill>
-                <a:latin typeface="IBM Plex Sans" pitchFamily="34" charset="0"/>
-                <a:ea typeface="IBM Plex Sans" pitchFamily="34" charset="-122"/>
-                <a:cs typeface="IBM Plex Sans" pitchFamily="34" charset="-120"/>
-              </a:rPr>
-              <a:t>Unreachable code</a:t>
-            </a:r>
-            <a:endParaRPr lang="en-US" sz="1600" dirty="0"/>
-          </a:p>
-        </p:txBody>
-      </p:sp>
-      <p:sp>
-        <p:nvSpPr>
-          <p:cNvPr id="15" name="Text 13"/>
-          <p:cNvSpPr txBox="1"/>
-          <p:nvPr/>
-        </p:nvSpPr>
-        <p:spPr>
-          <a:xfrm>
-            <a:off x="822960" y="4361688"/>
-            <a:ext cx="4754880" cy="1005840"/>
-          </a:xfrm>
-          <a:prstGeom prst="rect">
-            <a:avLst/>
-          </a:prstGeom>
-          <a:noFill/>
-          <a:ln/>
-        </p:spPr>
-        <p:txBody>
-          <a:bodyPr wrap="square" lIns="0" tIns="0" rIns="0" bIns="0" rtlCol="0" anchor="t"/>
-          <a:lstStyle/>
-          <a:p>
-            <a:pPr indent="0" marL="0">
-              <a:lnSpc>
-                <a:spcPct val="120000"/>
-              </a:lnSpc>
-              <a:buNone/>
-            </a:pPr>
-            <a:r>
-              <a:rPr lang="en-US" sz="1300" dirty="0">
-                <a:solidFill>
-                  <a:srgbClr val="667085"/>
-                </a:solidFill>
-                <a:latin typeface="IBM Plex Sans" pitchFamily="34" charset="0"/>
-                <a:ea typeface="IBM Plex Sans" pitchFamily="34" charset="-122"/>
-                <a:cs typeface="IBM Plex Sans" pitchFamily="34" charset="-120"/>
-              </a:rPr>
-              <a:t>If a band that catches everything is tested first, no branch below it can ever run - those lines are unreachable.</a:t>
-            </a:r>
-            <a:endParaRPr lang="en-US" sz="1300" dirty="0"/>
-          </a:p>
-        </p:txBody>
-      </p:sp>
-      <p:sp>
-        <p:nvSpPr>
-          <p:cNvPr id="16" name="Shape 14"/>
-          <p:cNvSpPr/>
-          <p:nvPr/>
-        </p:nvSpPr>
-        <p:spPr>
-          <a:xfrm>
-            <a:off x="6217920" y="3794760"/>
-            <a:ext cx="5394960" cy="1737360"/>
-          </a:xfrm>
-          <a:prstGeom prst="roundRect">
-            <a:avLst>
-              <a:gd name="adj" fmla="val 6316"/>
-            </a:avLst>
-          </a:prstGeom>
-          <a:solidFill>
-            <a:srgbClr val="FFFFFF"/>
-          </a:solidFill>
-          <a:ln w="15875">
-            <a:solidFill>
-              <a:srgbClr val="08A6A6"/>
-            </a:solidFill>
-            <a:prstDash val="solid"/>
-          </a:ln>
-        </p:spPr>
-      </p:sp>
-      <p:sp>
-        <p:nvSpPr>
-          <p:cNvPr id="17" name="Text 15"/>
-          <p:cNvSpPr txBox="1"/>
-          <p:nvPr/>
-        </p:nvSpPr>
-        <p:spPr>
-          <a:xfrm>
-            <a:off x="6537960" y="3977640"/>
-            <a:ext cx="4754880" cy="365760"/>
-          </a:xfrm>
-          <a:prstGeom prst="rect">
-            <a:avLst/>
-          </a:prstGeom>
-          <a:noFill/>
-          <a:ln/>
-        </p:spPr>
-        <p:txBody>
-          <a:bodyPr wrap="square" lIns="0" tIns="0" rIns="0" bIns="0" rtlCol="0" anchor="ctr"/>
-          <a:lstStyle/>
-          <a:p>
-            <a:pPr indent="0" marL="0">
-              <a:buNone/>
-            </a:pPr>
-            <a:r>
-              <a:rPr lang="en-US" sz="1600" b="1" dirty="0">
-                <a:solidFill>
-                  <a:srgbClr val="08A6A6"/>
-                </a:solidFill>
-                <a:latin typeface="IBM Plex Sans" pitchFamily="34" charset="0"/>
-                <a:ea typeface="IBM Plex Sans" pitchFamily="34" charset="-122"/>
-                <a:cs typeface="IBM Plex Sans" pitchFamily="34" charset="-120"/>
-              </a:rPr>
-              <a:t>Same as the gates</a:t>
-            </a:r>
-            <a:endParaRPr lang="en-US" sz="1600" dirty="0"/>
-          </a:p>
-        </p:txBody>
-      </p:sp>
-      <p:sp>
-        <p:nvSpPr>
-          <p:cNvPr id="18" name="Text 16"/>
-          <p:cNvSpPr txBox="1"/>
-          <p:nvPr/>
-        </p:nvSpPr>
-        <p:spPr>
-          <a:xfrm>
-            <a:off x="6537960" y="4361688"/>
-            <a:ext cx="4754880" cy="1005840"/>
-          </a:xfrm>
-          <a:prstGeom prst="rect">
-            <a:avLst/>
-          </a:prstGeom>
-          <a:noFill/>
-          <a:ln/>
-        </p:spPr>
-        <p:txBody>
-          <a:bodyPr wrap="square" lIns="0" tIns="0" rIns="0" bIns="0" rtlCol="0" anchor="t"/>
-          <a:lstStyle/>
-          <a:p>
-            <a:pPr indent="0" marL="0">
-              <a:lnSpc>
-                <a:spcPct val="120000"/>
-              </a:lnSpc>
-              <a:buNone/>
-            </a:pPr>
-            <a:r>
-              <a:rPr lang="en-US" sz="1300" dirty="0">
-                <a:solidFill>
-                  <a:srgbClr val="667085"/>
-                </a:solidFill>
-                <a:latin typeface="IBM Plex Sans" pitchFamily="34" charset="0"/>
-                <a:ea typeface="IBM Plex Sans" pitchFamily="34" charset="-122"/>
-                <a:cs typeface="IBM Plex Sans" pitchFamily="34" charset="-120"/>
-              </a:rPr>
-              <a:t>and, or and not behave exactly like the AND, OR and NOT gates you draw truth tables for in topic 2.4.</a:t>
-            </a:r>
-            <a:endParaRPr lang="en-US" sz="1300" dirty="0"/>
           </a:p>
         </p:txBody>
       </p:sp>
@@ -3952,7 +4239,7 @@
                 <a:ea typeface="IBM Plex Sans" pitchFamily="34" charset="-122"/>
                 <a:cs typeface="IBM Plex Sans" pitchFamily="34" charset="-120"/>
               </a:rPr>
-              <a:t>Exam practice</a:t>
+              <a:t>Worth knowing</a:t>
             </a:r>
             <a:endParaRPr lang="en-US" sz="3200" dirty="0"/>
           </a:p>
@@ -3991,7 +4278,7 @@
                 <a:ea typeface="IBM Plex Sans" pitchFamily="34" charset="-122"/>
                 <a:cs typeface="IBM Plex Sans" pitchFamily="34" charset="-120"/>
               </a:rPr>
-              <a:t>Devices away. Answer from memory on the worksheet.</a:t>
+              <a:t>The information markers dotted around the room</a:t>
             </a:r>
             <a:endParaRPr lang="en-US" sz="1500" dirty="0"/>
           </a:p>
@@ -4006,11 +4293,11 @@
         <p:spPr>
           <a:xfrm>
             <a:off x="502920" y="1828800"/>
-            <a:ext cx="11155680" cy="1097280"/>
+            <a:ext cx="5394960" cy="1737360"/>
           </a:xfrm>
           <a:prstGeom prst="roundRect">
             <a:avLst>
-              <a:gd name="adj" fmla="val 10000"/>
+              <a:gd name="adj" fmla="val 6316"/>
             </a:avLst>
           </a:prstGeom>
           <a:solidFill>
@@ -4018,7 +4305,7 @@
           </a:solidFill>
           <a:ln w="15875">
             <a:solidFill>
-              <a:srgbClr val="D9DEE7"/>
+              <a:srgbClr val="2D63FF"/>
             </a:solidFill>
             <a:prstDash val="solid"/>
           </a:ln>
@@ -4032,8 +4319,8 @@
         </p:nvSpPr>
         <p:spPr>
           <a:xfrm>
-            <a:off x="914400" y="1938528"/>
-            <a:ext cx="9418320" cy="877824"/>
+            <a:off x="822960" y="2011680"/>
+            <a:ext cx="4754880" cy="365760"/>
           </a:xfrm>
           <a:prstGeom prst="rect">
             <a:avLst/>
@@ -4046,237 +4333,79 @@
           <a:lstStyle/>
           <a:p>
             <a:pPr indent="0" marL="0">
-              <a:lnSpc>
-                <a:spcPct val="118000"/>
-              </a:lnSpc>
-              <a:buNone/>
-            </a:pPr>
-            <a:r>
-              <a:rPr lang="en-US" sz="1700" dirty="0">
-                <a:solidFill>
-                  <a:srgbClr val="101828"/>
+              <a:buNone/>
+            </a:pPr>
+            <a:r>
+              <a:rPr lang="en-US" sz="1600" b="1" dirty="0">
+                <a:solidFill>
+                  <a:srgbClr val="2D63FF"/>
                 </a:solidFill>
                 <a:latin typeface="IBM Plex Sans" pitchFamily="34" charset="0"/>
                 <a:ea typeface="IBM Plex Sans" pitchFamily="34" charset="-122"/>
                 <a:cs typeface="IBM Plex Sans" pitchFamily="34" charset="-120"/>
               </a:rPr>
-              <a:t>A program should print cheap when a number is 2 or less and dear when it is more. A pupil writes </a:t>
-            </a:r>
+              <a:t>One = or two</a:t>
+            </a:r>
+            <a:endParaRPr lang="en-US" sz="1600" dirty="0"/>
+          </a:p>
+        </p:txBody>
+      </p:sp>
+      <p:sp>
+        <p:nvSpPr>
+          <p:cNvPr id="9" name="Text 7"/>
+          <p:cNvSpPr txBox="1"/>
+          <p:nvPr/>
+        </p:nvSpPr>
+        <p:spPr>
+          <a:xfrm>
+            <a:off x="822960" y="2395728"/>
+            <a:ext cx="4754880" cy="1005840"/>
+          </a:xfrm>
+          <a:prstGeom prst="rect">
+            <a:avLst/>
+          </a:prstGeom>
+          <a:noFill/>
+          <a:ln/>
+        </p:spPr>
+        <p:txBody>
+          <a:bodyPr wrap="square" lIns="0" tIns="0" rIns="0" bIns="0" rtlCol="0" anchor="t"/>
+          <a:lstStyle/>
+          <a:p>
             <a:pPr indent="0" marL="0">
               <a:lnSpc>
-                <a:spcPct val="118000"/>
+                <a:spcPct val="120000"/>
               </a:lnSpc>
               <a:buNone/>
             </a:pPr>
             <a:r>
-              <a:rPr lang="en-US" sz="1700" dirty="0">
-                <a:solidFill>
-                  <a:srgbClr val="6B21A8"/>
-                </a:solidFill>
-                <a:latin typeface="IBM Plex Mono" pitchFamily="34" charset="0"/>
-                <a:ea typeface="IBM Plex Mono" pitchFamily="34" charset="-122"/>
-                <a:cs typeface="IBM Plex Mono" pitchFamily="34" charset="-120"/>
-              </a:rPr>
-              <a:t>if</a:t>
-            </a:r>
-            <a:pPr indent="0" marL="0">
-              <a:lnSpc>
-                <a:spcPct val="118000"/>
-              </a:lnSpc>
-              <a:buNone/>
-            </a:pPr>
-            <a:r>
-              <a:rPr lang="en-US" sz="1700" dirty="0">
-                <a:solidFill>
-                  <a:srgbClr val="18181B"/>
-                </a:solidFill>
-                <a:latin typeface="IBM Plex Mono" pitchFamily="34" charset="0"/>
-                <a:ea typeface="IBM Plex Mono" pitchFamily="34" charset="-122"/>
-                <a:cs typeface="IBM Plex Mono" pitchFamily="34" charset="-120"/>
-              </a:rPr>
-              <a:t> </a:t>
-            </a:r>
-            <a:pPr indent="0" marL="0">
-              <a:lnSpc>
-                <a:spcPct val="118000"/>
-              </a:lnSpc>
-              <a:buNone/>
-            </a:pPr>
-            <a:r>
-              <a:rPr lang="en-US" sz="1700" dirty="0">
-                <a:solidFill>
-                  <a:srgbClr val="18181B"/>
-                </a:solidFill>
-                <a:latin typeface="IBM Plex Mono" pitchFamily="34" charset="0"/>
-                <a:ea typeface="IBM Plex Mono" pitchFamily="34" charset="-122"/>
-                <a:cs typeface="IBM Plex Mono" pitchFamily="34" charset="-120"/>
-              </a:rPr>
-              <a:t>n</a:t>
-            </a:r>
-            <a:pPr indent="0" marL="0">
-              <a:lnSpc>
-                <a:spcPct val="118000"/>
-              </a:lnSpc>
-              <a:buNone/>
-            </a:pPr>
-            <a:r>
-              <a:rPr lang="en-US" sz="1700" dirty="0">
-                <a:solidFill>
-                  <a:srgbClr val="18181B"/>
-                </a:solidFill>
-                <a:latin typeface="IBM Plex Mono" pitchFamily="34" charset="0"/>
-                <a:ea typeface="IBM Plex Mono" pitchFamily="34" charset="-122"/>
-                <a:cs typeface="IBM Plex Mono" pitchFamily="34" charset="-120"/>
-              </a:rPr>
-              <a:t> </a:t>
-            </a:r>
-            <a:pPr indent="0" marL="0">
-              <a:lnSpc>
-                <a:spcPct val="118000"/>
-              </a:lnSpc>
-              <a:buNone/>
-            </a:pPr>
-            <a:r>
-              <a:rPr lang="en-US" sz="1700" dirty="0">
-                <a:solidFill>
-                  <a:srgbClr val="3F3F46"/>
-                </a:solidFill>
-                <a:latin typeface="IBM Plex Mono" pitchFamily="34" charset="0"/>
-                <a:ea typeface="IBM Plex Mono" pitchFamily="34" charset="-122"/>
-                <a:cs typeface="IBM Plex Mono" pitchFamily="34" charset="-120"/>
-              </a:rPr>
-              <a:t>&gt;</a:t>
-            </a:r>
-            <a:pPr indent="0" marL="0">
-              <a:lnSpc>
-                <a:spcPct val="118000"/>
-              </a:lnSpc>
-              <a:buNone/>
-            </a:pPr>
-            <a:r>
-              <a:rPr lang="en-US" sz="1700" dirty="0">
-                <a:solidFill>
-                  <a:srgbClr val="18181B"/>
-                </a:solidFill>
-                <a:latin typeface="IBM Plex Mono" pitchFamily="34" charset="0"/>
-                <a:ea typeface="IBM Plex Mono" pitchFamily="34" charset="-122"/>
-                <a:cs typeface="IBM Plex Mono" pitchFamily="34" charset="-120"/>
-              </a:rPr>
-              <a:t> </a:t>
-            </a:r>
-            <a:pPr indent="0" marL="0">
-              <a:lnSpc>
-                <a:spcPct val="118000"/>
-              </a:lnSpc>
-              <a:buNone/>
-            </a:pPr>
-            <a:r>
-              <a:rPr lang="en-US" sz="1700" dirty="0">
-                <a:solidFill>
-                  <a:srgbClr val="9A3412"/>
-                </a:solidFill>
-                <a:latin typeface="IBM Plex Mono" pitchFamily="34" charset="0"/>
-                <a:ea typeface="IBM Plex Mono" pitchFamily="34" charset="-122"/>
-                <a:cs typeface="IBM Plex Mono" pitchFamily="34" charset="-120"/>
-              </a:rPr>
-              <a:t>2</a:t>
-            </a:r>
-            <a:pPr indent="0" marL="0">
-              <a:lnSpc>
-                <a:spcPct val="118000"/>
-              </a:lnSpc>
-              <a:buNone/>
-            </a:pPr>
-            <a:r>
-              <a:rPr lang="en-US" sz="1700" dirty="0">
-                <a:solidFill>
-                  <a:srgbClr val="101828"/>
+              <a:rPr lang="en-US" sz="1300" dirty="0">
+                <a:solidFill>
+                  <a:srgbClr val="667085"/>
                 </a:solidFill>
                 <a:latin typeface="IBM Plex Sans" pitchFamily="34" charset="0"/>
                 <a:ea typeface="IBM Plex Sans" pitchFamily="34" charset="-122"/>
                 <a:cs typeface="IBM Plex Sans" pitchFamily="34" charset="-120"/>
               </a:rPr>
-              <a:t> then prints cheap, and else prints dear. Identify the logic error and write the two lines corrected.</a:t>
-            </a:r>
-            <a:endParaRPr lang="en-US" sz="1700" dirty="0"/>
-          </a:p>
-        </p:txBody>
-      </p:sp>
-      <p:sp>
-        <p:nvSpPr>
-          <p:cNvPr id="9" name="Shape 7"/>
+              <a:t>A single = stores a value and == compares two. Mixing them up is one of the first bugs every programmer meets.</a:t>
+            </a:r>
+            <a:endParaRPr lang="en-US" sz="1300" dirty="0"/>
+          </a:p>
+        </p:txBody>
+      </p:sp>
+      <p:sp>
+        <p:nvSpPr>
+          <p:cNvPr id="10" name="Shape 8"/>
           <p:cNvSpPr/>
           <p:nvPr/>
         </p:nvSpPr>
         <p:spPr>
           <a:xfrm>
-            <a:off x="10515600" y="2130552"/>
-            <a:ext cx="868680" cy="493776"/>
+            <a:off x="6217920" y="1828800"/>
+            <a:ext cx="5394960" cy="1737360"/>
           </a:xfrm>
           <a:prstGeom prst="roundRect">
             <a:avLst>
-              <a:gd name="adj" fmla="val 18519"/>
-            </a:avLst>
-          </a:prstGeom>
-          <a:solidFill>
-            <a:srgbClr val="EEF2FB"/>
-          </a:solidFill>
-          <a:ln/>
-        </p:spPr>
-      </p:sp>
-      <p:sp>
-        <p:nvSpPr>
-          <p:cNvPr id="10" name="Text 8"/>
-          <p:cNvSpPr txBox="1"/>
-          <p:nvPr/>
-        </p:nvSpPr>
-        <p:spPr>
-          <a:xfrm>
-            <a:off x="10515600" y="2130552"/>
-            <a:ext cx="868680" cy="493776"/>
-          </a:xfrm>
-          <a:prstGeom prst="rect">
-            <a:avLst/>
-          </a:prstGeom>
-          <a:noFill/>
-          <a:ln/>
-        </p:spPr>
-        <p:txBody>
-          <a:bodyPr wrap="square" lIns="0" tIns="0" rIns="0" bIns="0" rtlCol="0" anchor="ctr"/>
-          <a:lstStyle/>
-          <a:p>
-            <a:pPr algn="ctr" indent="0" marL="0">
-              <a:buNone/>
-            </a:pPr>
-            <a:r>
-              <a:rPr lang="en-US" sz="1500" b="1" dirty="0">
-                <a:solidFill>
-                  <a:srgbClr val="2D63FF"/>
-                </a:solidFill>
-                <a:latin typeface="IBM Plex Mono" pitchFamily="34" charset="0"/>
-                <a:ea typeface="IBM Plex Mono" pitchFamily="34" charset="-122"/>
-                <a:cs typeface="IBM Plex Mono" pitchFamily="34" charset="-120"/>
-              </a:rPr>
-              <a:t>[3]</a:t>
-            </a:r>
-            <a:endParaRPr lang="en-US" sz="1500" dirty="0"/>
-          </a:p>
-        </p:txBody>
-      </p:sp>
-      <p:sp>
-        <p:nvSpPr>
-          <p:cNvPr id="11" name="Shape 9"/>
-          <p:cNvSpPr/>
-          <p:nvPr/>
-        </p:nvSpPr>
-        <p:spPr>
-          <a:xfrm>
-            <a:off x="502920" y="3127248"/>
-            <a:ext cx="11155680" cy="1097280"/>
-          </a:xfrm>
-          <a:prstGeom prst="roundRect">
-            <a:avLst>
-              <a:gd name="adj" fmla="val 10000"/>
+              <a:gd name="adj" fmla="val 6316"/>
             </a:avLst>
           </a:prstGeom>
           <a:solidFill>
@@ -4284,7 +4413,7 @@
           </a:solidFill>
           <a:ln w="15875">
             <a:solidFill>
-              <a:srgbClr val="D9DEE7"/>
+              <a:srgbClr val="08A6A6"/>
             </a:solidFill>
             <a:prstDash val="solid"/>
           </a:ln>
@@ -4292,14 +4421,14 @@
       </p:sp>
       <p:sp>
         <p:nvSpPr>
-          <p:cNvPr id="12" name="Text 10"/>
-          <p:cNvSpPr txBox="1"/>
-          <p:nvPr/>
-        </p:nvSpPr>
-        <p:spPr>
-          <a:xfrm>
-            <a:off x="914400" y="3236976"/>
-            <a:ext cx="9418320" cy="877824"/>
+          <p:cNvPr id="11" name="Text 9"/>
+          <p:cNvSpPr txBox="1"/>
+          <p:nvPr/>
+        </p:nvSpPr>
+        <p:spPr>
+          <a:xfrm>
+            <a:off x="6537960" y="2011680"/>
+            <a:ext cx="4754880" cy="365760"/>
           </a:xfrm>
           <a:prstGeom prst="rect">
             <a:avLst/>
@@ -4312,23 +4441,62 @@
           <a:lstStyle/>
           <a:p>
             <a:pPr indent="0" marL="0">
-              <a:lnSpc>
-                <a:spcPct val="118000"/>
-              </a:lnSpc>
-              <a:buNone/>
-            </a:pPr>
-            <a:r>
-              <a:rPr lang="en-US" sz="1700" dirty="0">
-                <a:solidFill>
-                  <a:srgbClr val="101828"/>
+              <a:buNone/>
+            </a:pPr>
+            <a:r>
+              <a:rPr lang="en-US" sz="1600" b="1" dirty="0">
+                <a:solidFill>
+                  <a:srgbClr val="08A6A6"/>
                 </a:solidFill>
                 <a:latin typeface="IBM Plex Sans" pitchFamily="34" charset="0"/>
                 <a:ea typeface="IBM Plex Sans" pitchFamily="34" charset="-122"/>
                 <a:cs typeface="IBM Plex Sans" pitchFamily="34" charset="-120"/>
               </a:rPr>
-              <a:t>Write a program that reads a whole number and prints small when it is 10 or less, medium when it is more than 10 but 100 or less, and large when it is more than 100.</a:t>
-            </a:r>
-            <a:endParaRPr lang="en-US" sz="1700" dirty="0"/>
+              <a:t>No switch here</a:t>
+            </a:r>
+            <a:endParaRPr lang="en-US" sz="1600" dirty="0"/>
+          </a:p>
+        </p:txBody>
+      </p:sp>
+      <p:sp>
+        <p:nvSpPr>
+          <p:cNvPr id="12" name="Text 10"/>
+          <p:cNvSpPr txBox="1"/>
+          <p:nvPr/>
+        </p:nvSpPr>
+        <p:spPr>
+          <a:xfrm>
+            <a:off x="6537960" y="2395728"/>
+            <a:ext cx="4754880" cy="1005840"/>
+          </a:xfrm>
+          <a:prstGeom prst="rect">
+            <a:avLst/>
+          </a:prstGeom>
+          <a:noFill/>
+          <a:ln/>
+        </p:spPr>
+        <p:txBody>
+          <a:bodyPr wrap="square" lIns="0" tIns="0" rIns="0" bIns="0" rtlCol="0" anchor="t"/>
+          <a:lstStyle/>
+          <a:p>
+            <a:pPr indent="0" marL="0">
+              <a:lnSpc>
+                <a:spcPct val="120000"/>
+              </a:lnSpc>
+              <a:buNone/>
+            </a:pPr>
+            <a:r>
+              <a:rPr lang="en-US" sz="1300" dirty="0">
+                <a:solidFill>
+                  <a:srgbClr val="667085"/>
+                </a:solidFill>
+                <a:latin typeface="IBM Plex Sans" pitchFamily="34" charset="0"/>
+                <a:ea typeface="IBM Plex Sans" pitchFamily="34" charset="-122"/>
+                <a:cs typeface="IBM Plex Sans" pitchFamily="34" charset="-120"/>
+              </a:rPr>
+              <a:t>Some languages have a switch statement for choosing between many options. Python does the same job with elif.</a:t>
+            </a:r>
+            <a:endParaRPr lang="en-US" sz="1300" dirty="0"/>
           </a:p>
         </p:txBody>
       </p:sp>
@@ -4340,73 +4508,12 @@
         </p:nvSpPr>
         <p:spPr>
           <a:xfrm>
-            <a:off x="10515600" y="3429000"/>
-            <a:ext cx="868680" cy="493776"/>
+            <a:off x="502920" y="3794760"/>
+            <a:ext cx="5394960" cy="1737360"/>
           </a:xfrm>
           <a:prstGeom prst="roundRect">
             <a:avLst>
-              <a:gd name="adj" fmla="val 18519"/>
-            </a:avLst>
-          </a:prstGeom>
-          <a:solidFill>
-            <a:srgbClr val="EEF2FB"/>
-          </a:solidFill>
-          <a:ln/>
-        </p:spPr>
-      </p:sp>
-      <p:sp>
-        <p:nvSpPr>
-          <p:cNvPr id="14" name="Text 12"/>
-          <p:cNvSpPr txBox="1"/>
-          <p:nvPr/>
-        </p:nvSpPr>
-        <p:spPr>
-          <a:xfrm>
-            <a:off x="10515600" y="3429000"/>
-            <a:ext cx="868680" cy="493776"/>
-          </a:xfrm>
-          <a:prstGeom prst="rect">
-            <a:avLst/>
-          </a:prstGeom>
-          <a:noFill/>
-          <a:ln/>
-        </p:spPr>
-        <p:txBody>
-          <a:bodyPr wrap="square" lIns="0" tIns="0" rIns="0" bIns="0" rtlCol="0" anchor="ctr"/>
-          <a:lstStyle/>
-          <a:p>
-            <a:pPr algn="ctr" indent="0" marL="0">
-              <a:buNone/>
-            </a:pPr>
-            <a:r>
-              <a:rPr lang="en-US" sz="1500" b="1" dirty="0">
-                <a:solidFill>
-                  <a:srgbClr val="2D63FF"/>
-                </a:solidFill>
-                <a:latin typeface="IBM Plex Mono" pitchFamily="34" charset="0"/>
-                <a:ea typeface="IBM Plex Mono" pitchFamily="34" charset="-122"/>
-                <a:cs typeface="IBM Plex Mono" pitchFamily="34" charset="-120"/>
-              </a:rPr>
-              <a:t>[4]</a:t>
-            </a:r>
-            <a:endParaRPr lang="en-US" sz="1500" dirty="0"/>
-          </a:p>
-        </p:txBody>
-      </p:sp>
-      <p:sp>
-        <p:nvSpPr>
-          <p:cNvPr id="15" name="Shape 13"/>
-          <p:cNvSpPr/>
-          <p:nvPr/>
-        </p:nvSpPr>
-        <p:spPr>
-          <a:xfrm>
-            <a:off x="502920" y="4425696"/>
-            <a:ext cx="11155680" cy="1097280"/>
-          </a:xfrm>
-          <a:prstGeom prst="roundRect">
-            <a:avLst>
-              <a:gd name="adj" fmla="val 10000"/>
+              <a:gd name="adj" fmla="val 6316"/>
             </a:avLst>
           </a:prstGeom>
           <a:solidFill>
@@ -4414,7 +4521,7 @@
           </a:solidFill>
           <a:ln w="15875">
             <a:solidFill>
-              <a:srgbClr val="D9DEE7"/>
+              <a:srgbClr val="2D63FF"/>
             </a:solidFill>
             <a:prstDash val="solid"/>
           </a:ln>
@@ -4422,14 +4529,14 @@
       </p:sp>
       <p:sp>
         <p:nvSpPr>
-          <p:cNvPr id="16" name="Text 14"/>
-          <p:cNvSpPr txBox="1"/>
-          <p:nvPr/>
-        </p:nvSpPr>
-        <p:spPr>
-          <a:xfrm>
-            <a:off x="914400" y="4535424"/>
-            <a:ext cx="9418320" cy="877824"/>
+          <p:cNvPr id="14" name="Text 12"/>
+          <p:cNvSpPr txBox="1"/>
+          <p:nvPr/>
+        </p:nvSpPr>
+        <p:spPr>
+          <a:xfrm>
+            <a:off x="822960" y="3977640"/>
+            <a:ext cx="4754880" cy="365760"/>
           </a:xfrm>
           <a:prstGeom prst="rect">
             <a:avLst/>
@@ -4442,47 +4549,130 @@
           <a:lstStyle/>
           <a:p>
             <a:pPr indent="0" marL="0">
-              <a:lnSpc>
-                <a:spcPct val="118000"/>
-              </a:lnSpc>
-              <a:buNone/>
-            </a:pPr>
-            <a:r>
-              <a:rPr lang="en-US" sz="1700" dirty="0">
-                <a:solidFill>
-                  <a:srgbClr val="101828"/>
+              <a:buNone/>
+            </a:pPr>
+            <a:r>
+              <a:rPr lang="en-US" sz="1600" b="1" dirty="0">
+                <a:solidFill>
+                  <a:srgbClr val="2D63FF"/>
                 </a:solidFill>
                 <a:latin typeface="IBM Plex Sans" pitchFamily="34" charset="0"/>
                 <a:ea typeface="IBM Plex Sans" pitchFamily="34" charset="-122"/>
                 <a:cs typeface="IBM Plex Sans" pitchFamily="34" charset="-120"/>
               </a:rPr>
-              <a:t>Write a program that reads a whole number and then a word, and prints open only when the number is 3 or 7 and the word is not locked. Otherwise it prints refused.</a:t>
-            </a:r>
-            <a:endParaRPr lang="en-US" sz="1700" dirty="0"/>
-          </a:p>
-        </p:txBody>
-      </p:sp>
-      <p:sp>
-        <p:nvSpPr>
-          <p:cNvPr id="17" name="Shape 15"/>
+              <a:t>Unreachable code</a:t>
+            </a:r>
+            <a:endParaRPr lang="en-US" sz="1600" dirty="0"/>
+          </a:p>
+        </p:txBody>
+      </p:sp>
+      <p:sp>
+        <p:nvSpPr>
+          <p:cNvPr id="15" name="Text 13"/>
+          <p:cNvSpPr txBox="1"/>
+          <p:nvPr/>
+        </p:nvSpPr>
+        <p:spPr>
+          <a:xfrm>
+            <a:off x="822960" y="4361688"/>
+            <a:ext cx="4754880" cy="1005840"/>
+          </a:xfrm>
+          <a:prstGeom prst="rect">
+            <a:avLst/>
+          </a:prstGeom>
+          <a:noFill/>
+          <a:ln/>
+        </p:spPr>
+        <p:txBody>
+          <a:bodyPr wrap="square" lIns="0" tIns="0" rIns="0" bIns="0" rtlCol="0" anchor="t"/>
+          <a:lstStyle/>
+          <a:p>
+            <a:pPr indent="0" marL="0">
+              <a:lnSpc>
+                <a:spcPct val="120000"/>
+              </a:lnSpc>
+              <a:buNone/>
+            </a:pPr>
+            <a:r>
+              <a:rPr lang="en-US" sz="1300" dirty="0">
+                <a:solidFill>
+                  <a:srgbClr val="667085"/>
+                </a:solidFill>
+                <a:latin typeface="IBM Plex Sans" pitchFamily="34" charset="0"/>
+                <a:ea typeface="IBM Plex Sans" pitchFamily="34" charset="-122"/>
+                <a:cs typeface="IBM Plex Sans" pitchFamily="34" charset="-120"/>
+              </a:rPr>
+              <a:t>If a band that catches everything is tested first, no branch below it can ever run - those lines are unreachable.</a:t>
+            </a:r>
+            <a:endParaRPr lang="en-US" sz="1300" dirty="0"/>
+          </a:p>
+        </p:txBody>
+      </p:sp>
+      <p:sp>
+        <p:nvSpPr>
+          <p:cNvPr id="16" name="Shape 14"/>
           <p:cNvSpPr/>
           <p:nvPr/>
         </p:nvSpPr>
         <p:spPr>
           <a:xfrm>
-            <a:off x="10515600" y="4727448"/>
-            <a:ext cx="868680" cy="493776"/>
+            <a:off x="6217920" y="3794760"/>
+            <a:ext cx="5394960" cy="1737360"/>
           </a:xfrm>
           <a:prstGeom prst="roundRect">
             <a:avLst>
-              <a:gd name="adj" fmla="val 18519"/>
+              <a:gd name="adj" fmla="val 6316"/>
             </a:avLst>
           </a:prstGeom>
           <a:solidFill>
-            <a:srgbClr val="EEF2FB"/>
+            <a:srgbClr val="FFFFFF"/>
           </a:solidFill>
-          <a:ln/>
-        </p:spPr>
+          <a:ln w="15875">
+            <a:solidFill>
+              <a:srgbClr val="08A6A6"/>
+            </a:solidFill>
+            <a:prstDash val="solid"/>
+          </a:ln>
+        </p:spPr>
+      </p:sp>
+      <p:sp>
+        <p:nvSpPr>
+          <p:cNvPr id="17" name="Text 15"/>
+          <p:cNvSpPr txBox="1"/>
+          <p:nvPr/>
+        </p:nvSpPr>
+        <p:spPr>
+          <a:xfrm>
+            <a:off x="6537960" y="3977640"/>
+            <a:ext cx="4754880" cy="365760"/>
+          </a:xfrm>
+          <a:prstGeom prst="rect">
+            <a:avLst/>
+          </a:prstGeom>
+          <a:noFill/>
+          <a:ln/>
+        </p:spPr>
+        <p:txBody>
+          <a:bodyPr wrap="square" lIns="0" tIns="0" rIns="0" bIns="0" rtlCol="0" anchor="ctr"/>
+          <a:lstStyle/>
+          <a:p>
+            <a:pPr indent="0" marL="0">
+              <a:buNone/>
+            </a:pPr>
+            <a:r>
+              <a:rPr lang="en-US" sz="1600" b="1" dirty="0">
+                <a:solidFill>
+                  <a:srgbClr val="08A6A6"/>
+                </a:solidFill>
+                <a:latin typeface="IBM Plex Sans" pitchFamily="34" charset="0"/>
+                <a:ea typeface="IBM Plex Sans" pitchFamily="34" charset="-122"/>
+                <a:cs typeface="IBM Plex Sans" pitchFamily="34" charset="-120"/>
+              </a:rPr>
+              <a:t>Same as the gates</a:t>
+            </a:r>
+            <a:endParaRPr lang="en-US" sz="1600" dirty="0"/>
+          </a:p>
+        </p:txBody>
       </p:sp>
       <p:sp>
         <p:nvSpPr>
@@ -4492,34 +4682,37 @@
         </p:nvSpPr>
         <p:spPr>
           <a:xfrm>
-            <a:off x="10515600" y="4727448"/>
-            <a:ext cx="868680" cy="493776"/>
-          </a:xfrm>
-          <a:prstGeom prst="rect">
-            <a:avLst/>
-          </a:prstGeom>
-          <a:noFill/>
-          <a:ln/>
-        </p:spPr>
-        <p:txBody>
-          <a:bodyPr wrap="square" lIns="0" tIns="0" rIns="0" bIns="0" rtlCol="0" anchor="ctr"/>
-          <a:lstStyle/>
-          <a:p>
-            <a:pPr algn="ctr" indent="0" marL="0">
-              <a:buNone/>
-            </a:pPr>
-            <a:r>
-              <a:rPr lang="en-US" sz="1500" b="1" dirty="0">
-                <a:solidFill>
-                  <a:srgbClr val="2D63FF"/>
-                </a:solidFill>
-                <a:latin typeface="IBM Plex Mono" pitchFamily="34" charset="0"/>
-                <a:ea typeface="IBM Plex Mono" pitchFamily="34" charset="-122"/>
-                <a:cs typeface="IBM Plex Mono" pitchFamily="34" charset="-120"/>
-              </a:rPr>
-              <a:t>[4]</a:t>
-            </a:r>
-            <a:endParaRPr lang="en-US" sz="1500" dirty="0"/>
+            <a:off x="6537960" y="4361688"/>
+            <a:ext cx="4754880" cy="1005840"/>
+          </a:xfrm>
+          <a:prstGeom prst="rect">
+            <a:avLst/>
+          </a:prstGeom>
+          <a:noFill/>
+          <a:ln/>
+        </p:spPr>
+        <p:txBody>
+          <a:bodyPr wrap="square" lIns="0" tIns="0" rIns="0" bIns="0" rtlCol="0" anchor="t"/>
+          <a:lstStyle/>
+          <a:p>
+            <a:pPr indent="0" marL="0">
+              <a:lnSpc>
+                <a:spcPct val="120000"/>
+              </a:lnSpc>
+              <a:buNone/>
+            </a:pPr>
+            <a:r>
+              <a:rPr lang="en-US" sz="1300" dirty="0">
+                <a:solidFill>
+                  <a:srgbClr val="667085"/>
+                </a:solidFill>
+                <a:latin typeface="IBM Plex Sans" pitchFamily="34" charset="0"/>
+                <a:ea typeface="IBM Plex Sans" pitchFamily="34" charset="-122"/>
+                <a:cs typeface="IBM Plex Sans" pitchFamily="34" charset="-120"/>
+              </a:rPr>
+              <a:t>and, or and not behave exactly like the AND, OR and NOT gates you draw truth tables for in topic 2.4.</a:t>
+            </a:r>
+            <a:endParaRPr lang="en-US" sz="1300" dirty="0"/>
           </a:p>
         </p:txBody>
       </p:sp>
@@ -4534,6 +4727,740 @@
 <file path=ppt/slides/slide14.xml><?xml version="1.0" encoding="utf-8"?>
 <p:sld xmlns:a="http://schemas.openxmlformats.org/drawingml/2006/main" xmlns:r="http://schemas.openxmlformats.org/officeDocument/2006/relationships" xmlns:p="http://schemas.openxmlformats.org/presentationml/2006/main">
   <p:cSld name="Slide 14">
+    <p:bg>
+      <p:bgPr>
+        <a:solidFill>
+          <a:srgbClr val="F7F7F4"/>
+        </a:solidFill>
+      </p:bgPr>
+    </p:bg>
+    <p:spTree>
+      <p:nvGrpSpPr>
+        <p:cNvPr id="1" name=""/>
+        <p:cNvGrpSpPr/>
+        <p:nvPr/>
+      </p:nvGrpSpPr>
+      <p:grpSpPr>
+        <a:xfrm>
+          <a:off x="0" y="0"/>
+          <a:ext cx="0" cy="0"/>
+          <a:chOff x="0" y="0"/>
+          <a:chExt cx="0" cy="0"/>
+        </a:xfrm>
+      </p:grpSpPr>
+      <p:sp>
+        <p:nvSpPr>
+          <p:cNvPr id="2" name="Shape 0"/>
+          <p:cNvSpPr/>
+          <p:nvPr/>
+        </p:nvSpPr>
+        <p:spPr>
+          <a:xfrm>
+            <a:off x="0" y="0"/>
+            <a:ext cx="12188952" cy="82296"/>
+          </a:xfrm>
+          <a:prstGeom prst="rect">
+            <a:avLst/>
+          </a:prstGeom>
+          <a:solidFill>
+            <a:srgbClr val="2D63FF"/>
+          </a:solidFill>
+          <a:ln/>
+        </p:spPr>
+      </p:sp>
+      <p:sp>
+        <p:nvSpPr>
+          <p:cNvPr id="3" name="Text 1"/>
+          <p:cNvSpPr txBox="1"/>
+          <p:nvPr/>
+        </p:nvSpPr>
+        <p:spPr>
+          <a:xfrm>
+            <a:off x="502920" y="6236208"/>
+            <a:ext cx="7772400" cy="365760"/>
+          </a:xfrm>
+          <a:prstGeom prst="rect">
+            <a:avLst/>
+          </a:prstGeom>
+          <a:noFill/>
+          <a:ln/>
+        </p:spPr>
+        <p:txBody>
+          <a:bodyPr wrap="square" lIns="0" tIns="0" rIns="0" bIns="0" rtlCol="0" anchor="ctr"/>
+          <a:lstStyle/>
+          <a:p>
+            <a:pPr indent="0" marL="0">
+              <a:buNone/>
+            </a:pPr>
+            <a:r>
+              <a:rPr lang="en-US" sz="1100" dirty="0">
+                <a:solidFill>
+                  <a:srgbClr val="667085"/>
+                </a:solidFill>
+                <a:latin typeface="IBM Plex Mono" pitchFamily="34" charset="0"/>
+                <a:ea typeface="IBM Plex Mono" pitchFamily="34" charset="-122"/>
+                <a:cs typeface="IBM Plex Mono" pitchFamily="34" charset="-120"/>
+              </a:rPr>
+              <a:t>Python programming  |  Lesson 3</a:t>
+            </a:r>
+            <a:endParaRPr lang="en-US" sz="1100" dirty="0"/>
+          </a:p>
+        </p:txBody>
+      </p:sp>
+      <p:sp>
+        <p:nvSpPr>
+          <p:cNvPr id="4" name="Text 2"/>
+          <p:cNvSpPr txBox="1"/>
+          <p:nvPr/>
+        </p:nvSpPr>
+        <p:spPr>
+          <a:xfrm>
+            <a:off x="9326880" y="6236208"/>
+            <a:ext cx="2377440" cy="365760"/>
+          </a:xfrm>
+          <a:prstGeom prst="rect">
+            <a:avLst/>
+          </a:prstGeom>
+          <a:noFill/>
+          <a:ln/>
+        </p:spPr>
+        <p:txBody>
+          <a:bodyPr wrap="square" lIns="0" tIns="0" rIns="0" bIns="0" rtlCol="0" anchor="ctr"/>
+          <a:lstStyle/>
+          <a:p>
+            <a:pPr algn="r" indent="0" marL="0">
+              <a:buNone/>
+            </a:pPr>
+            <a:r>
+              <a:rPr lang="en-US" sz="1100" dirty="0">
+                <a:solidFill>
+                  <a:srgbClr val="667085"/>
+                </a:solidFill>
+                <a:latin typeface="IBM Plex Mono" pitchFamily="34" charset="0"/>
+                <a:ea typeface="IBM Plex Mono" pitchFamily="34" charset="-122"/>
+                <a:cs typeface="IBM Plex Mono" pitchFamily="34" charset="-120"/>
+              </a:rPr>
+              <a:t>Revise 360</a:t>
+            </a:r>
+            <a:endParaRPr lang="en-US" sz="1100" dirty="0"/>
+          </a:p>
+        </p:txBody>
+      </p:sp>
+      <p:sp>
+        <p:nvSpPr>
+          <p:cNvPr id="5" name="Text 3"/>
+          <p:cNvSpPr txBox="1"/>
+          <p:nvPr/>
+        </p:nvSpPr>
+        <p:spPr>
+          <a:xfrm>
+            <a:off x="502920" y="411480"/>
+            <a:ext cx="11155680" cy="777240"/>
+          </a:xfrm>
+          <a:prstGeom prst="rect">
+            <a:avLst/>
+          </a:prstGeom>
+          <a:noFill/>
+          <a:ln/>
+        </p:spPr>
+        <p:txBody>
+          <a:bodyPr wrap="square" lIns="0" tIns="0" rIns="0" bIns="0" rtlCol="0" anchor="ctr"/>
+          <a:lstStyle/>
+          <a:p>
+            <a:pPr indent="0" marL="0">
+              <a:buNone/>
+            </a:pPr>
+            <a:r>
+              <a:rPr lang="en-US" sz="3200" b="1" dirty="0">
+                <a:solidFill>
+                  <a:srgbClr val="101828"/>
+                </a:solidFill>
+                <a:latin typeface="IBM Plex Sans" pitchFamily="34" charset="0"/>
+                <a:ea typeface="IBM Plex Sans" pitchFamily="34" charset="-122"/>
+                <a:cs typeface="IBM Plex Sans" pitchFamily="34" charset="-120"/>
+              </a:rPr>
+              <a:t>Exam practice</a:t>
+            </a:r>
+            <a:endParaRPr lang="en-US" sz="3200" dirty="0"/>
+          </a:p>
+        </p:txBody>
+      </p:sp>
+      <p:sp>
+        <p:nvSpPr>
+          <p:cNvPr id="6" name="Text 4"/>
+          <p:cNvSpPr txBox="1"/>
+          <p:nvPr/>
+        </p:nvSpPr>
+        <p:spPr>
+          <a:xfrm>
+            <a:off x="502920" y="1170432"/>
+            <a:ext cx="11155680" cy="411480"/>
+          </a:xfrm>
+          <a:prstGeom prst="rect">
+            <a:avLst/>
+          </a:prstGeom>
+          <a:noFill/>
+          <a:ln/>
+        </p:spPr>
+        <p:txBody>
+          <a:bodyPr wrap="square" lIns="0" tIns="0" rIns="0" bIns="0" rtlCol="0" anchor="ctr"/>
+          <a:lstStyle/>
+          <a:p>
+            <a:pPr indent="0" marL="0">
+              <a:buNone/>
+            </a:pPr>
+            <a:r>
+              <a:rPr lang="en-US" sz="1500" dirty="0">
+                <a:solidFill>
+                  <a:srgbClr val="667085"/>
+                </a:solidFill>
+                <a:latin typeface="IBM Plex Sans" pitchFamily="34" charset="0"/>
+                <a:ea typeface="IBM Plex Sans" pitchFamily="34" charset="-122"/>
+                <a:cs typeface="IBM Plex Sans" pitchFamily="34" charset="-120"/>
+              </a:rPr>
+              <a:t>Devices away. Answer from memory on the worksheet.</a:t>
+            </a:r>
+            <a:endParaRPr lang="en-US" sz="1500" dirty="0"/>
+          </a:p>
+        </p:txBody>
+      </p:sp>
+      <p:sp>
+        <p:nvSpPr>
+          <p:cNvPr id="7" name="Shape 5"/>
+          <p:cNvSpPr/>
+          <p:nvPr/>
+        </p:nvSpPr>
+        <p:spPr>
+          <a:xfrm>
+            <a:off x="502920" y="1828800"/>
+            <a:ext cx="11155680" cy="1097280"/>
+          </a:xfrm>
+          <a:prstGeom prst="roundRect">
+            <a:avLst>
+              <a:gd name="adj" fmla="val 10000"/>
+            </a:avLst>
+          </a:prstGeom>
+          <a:solidFill>
+            <a:srgbClr val="FFFFFF"/>
+          </a:solidFill>
+          <a:ln w="15875">
+            <a:solidFill>
+              <a:srgbClr val="D9DEE7"/>
+            </a:solidFill>
+            <a:prstDash val="solid"/>
+          </a:ln>
+        </p:spPr>
+      </p:sp>
+      <p:sp>
+        <p:nvSpPr>
+          <p:cNvPr id="8" name="Text 6"/>
+          <p:cNvSpPr txBox="1"/>
+          <p:nvPr/>
+        </p:nvSpPr>
+        <p:spPr>
+          <a:xfrm>
+            <a:off x="914400" y="1938528"/>
+            <a:ext cx="9418320" cy="877824"/>
+          </a:xfrm>
+          <a:prstGeom prst="rect">
+            <a:avLst/>
+          </a:prstGeom>
+          <a:noFill/>
+          <a:ln/>
+        </p:spPr>
+        <p:txBody>
+          <a:bodyPr wrap="square" lIns="0" tIns="0" rIns="0" bIns="0" rtlCol="0" anchor="ctr"/>
+          <a:lstStyle/>
+          <a:p>
+            <a:pPr indent="0" marL="0">
+              <a:lnSpc>
+                <a:spcPct val="118000"/>
+              </a:lnSpc>
+              <a:buNone/>
+            </a:pPr>
+            <a:r>
+              <a:rPr lang="en-US" sz="1700" dirty="0">
+                <a:solidFill>
+                  <a:srgbClr val="101828"/>
+                </a:solidFill>
+                <a:latin typeface="IBM Plex Sans" pitchFamily="34" charset="0"/>
+                <a:ea typeface="IBM Plex Sans" pitchFamily="34" charset="-122"/>
+                <a:cs typeface="IBM Plex Sans" pitchFamily="34" charset="-120"/>
+              </a:rPr>
+              <a:t>A program should print cheap when a number is 2 or less and dear when it is more. A pupil writes </a:t>
+            </a:r>
+            <a:pPr indent="0" marL="0">
+              <a:lnSpc>
+                <a:spcPct val="118000"/>
+              </a:lnSpc>
+              <a:buNone/>
+            </a:pPr>
+            <a:r>
+              <a:rPr lang="en-US" sz="1700" dirty="0">
+                <a:solidFill>
+                  <a:srgbClr val="6B21A8"/>
+                </a:solidFill>
+                <a:latin typeface="IBM Plex Mono" pitchFamily="34" charset="0"/>
+                <a:ea typeface="IBM Plex Mono" pitchFamily="34" charset="-122"/>
+                <a:cs typeface="IBM Plex Mono" pitchFamily="34" charset="-120"/>
+              </a:rPr>
+              <a:t>if</a:t>
+            </a:r>
+            <a:pPr indent="0" marL="0">
+              <a:lnSpc>
+                <a:spcPct val="118000"/>
+              </a:lnSpc>
+              <a:buNone/>
+            </a:pPr>
+            <a:r>
+              <a:rPr lang="en-US" sz="1700" dirty="0">
+                <a:solidFill>
+                  <a:srgbClr val="18181B"/>
+                </a:solidFill>
+                <a:latin typeface="IBM Plex Mono" pitchFamily="34" charset="0"/>
+                <a:ea typeface="IBM Plex Mono" pitchFamily="34" charset="-122"/>
+                <a:cs typeface="IBM Plex Mono" pitchFamily="34" charset="-120"/>
+              </a:rPr>
+              <a:t> </a:t>
+            </a:r>
+            <a:pPr indent="0" marL="0">
+              <a:lnSpc>
+                <a:spcPct val="118000"/>
+              </a:lnSpc>
+              <a:buNone/>
+            </a:pPr>
+            <a:r>
+              <a:rPr lang="en-US" sz="1700" dirty="0">
+                <a:solidFill>
+                  <a:srgbClr val="18181B"/>
+                </a:solidFill>
+                <a:latin typeface="IBM Plex Mono" pitchFamily="34" charset="0"/>
+                <a:ea typeface="IBM Plex Mono" pitchFamily="34" charset="-122"/>
+                <a:cs typeface="IBM Plex Mono" pitchFamily="34" charset="-120"/>
+              </a:rPr>
+              <a:t>n</a:t>
+            </a:r>
+            <a:pPr indent="0" marL="0">
+              <a:lnSpc>
+                <a:spcPct val="118000"/>
+              </a:lnSpc>
+              <a:buNone/>
+            </a:pPr>
+            <a:r>
+              <a:rPr lang="en-US" sz="1700" dirty="0">
+                <a:solidFill>
+                  <a:srgbClr val="18181B"/>
+                </a:solidFill>
+                <a:latin typeface="IBM Plex Mono" pitchFamily="34" charset="0"/>
+                <a:ea typeface="IBM Plex Mono" pitchFamily="34" charset="-122"/>
+                <a:cs typeface="IBM Plex Mono" pitchFamily="34" charset="-120"/>
+              </a:rPr>
+              <a:t> </a:t>
+            </a:r>
+            <a:pPr indent="0" marL="0">
+              <a:lnSpc>
+                <a:spcPct val="118000"/>
+              </a:lnSpc>
+              <a:buNone/>
+            </a:pPr>
+            <a:r>
+              <a:rPr lang="en-US" sz="1700" dirty="0">
+                <a:solidFill>
+                  <a:srgbClr val="3F3F46"/>
+                </a:solidFill>
+                <a:latin typeface="IBM Plex Mono" pitchFamily="34" charset="0"/>
+                <a:ea typeface="IBM Plex Mono" pitchFamily="34" charset="-122"/>
+                <a:cs typeface="IBM Plex Mono" pitchFamily="34" charset="-120"/>
+              </a:rPr>
+              <a:t>&gt;</a:t>
+            </a:r>
+            <a:pPr indent="0" marL="0">
+              <a:lnSpc>
+                <a:spcPct val="118000"/>
+              </a:lnSpc>
+              <a:buNone/>
+            </a:pPr>
+            <a:r>
+              <a:rPr lang="en-US" sz="1700" dirty="0">
+                <a:solidFill>
+                  <a:srgbClr val="18181B"/>
+                </a:solidFill>
+                <a:latin typeface="IBM Plex Mono" pitchFamily="34" charset="0"/>
+                <a:ea typeface="IBM Plex Mono" pitchFamily="34" charset="-122"/>
+                <a:cs typeface="IBM Plex Mono" pitchFamily="34" charset="-120"/>
+              </a:rPr>
+              <a:t> </a:t>
+            </a:r>
+            <a:pPr indent="0" marL="0">
+              <a:lnSpc>
+                <a:spcPct val="118000"/>
+              </a:lnSpc>
+              <a:buNone/>
+            </a:pPr>
+            <a:r>
+              <a:rPr lang="en-US" sz="1700" dirty="0">
+                <a:solidFill>
+                  <a:srgbClr val="9A3412"/>
+                </a:solidFill>
+                <a:latin typeface="IBM Plex Mono" pitchFamily="34" charset="0"/>
+                <a:ea typeface="IBM Plex Mono" pitchFamily="34" charset="-122"/>
+                <a:cs typeface="IBM Plex Mono" pitchFamily="34" charset="-120"/>
+              </a:rPr>
+              <a:t>2</a:t>
+            </a:r>
+            <a:pPr indent="0" marL="0">
+              <a:lnSpc>
+                <a:spcPct val="118000"/>
+              </a:lnSpc>
+              <a:buNone/>
+            </a:pPr>
+            <a:r>
+              <a:rPr lang="en-US" sz="1700" dirty="0">
+                <a:solidFill>
+                  <a:srgbClr val="101828"/>
+                </a:solidFill>
+                <a:latin typeface="IBM Plex Sans" pitchFamily="34" charset="0"/>
+                <a:ea typeface="IBM Plex Sans" pitchFamily="34" charset="-122"/>
+                <a:cs typeface="IBM Plex Sans" pitchFamily="34" charset="-120"/>
+              </a:rPr>
+              <a:t> then prints cheap, and else prints dear. Identify the logic error and write the two lines corrected.</a:t>
+            </a:r>
+            <a:endParaRPr lang="en-US" sz="1700" dirty="0"/>
+          </a:p>
+        </p:txBody>
+      </p:sp>
+      <p:sp>
+        <p:nvSpPr>
+          <p:cNvPr id="9" name="Shape 7"/>
+          <p:cNvSpPr/>
+          <p:nvPr/>
+        </p:nvSpPr>
+        <p:spPr>
+          <a:xfrm>
+            <a:off x="10515600" y="2130552"/>
+            <a:ext cx="868680" cy="493776"/>
+          </a:xfrm>
+          <a:prstGeom prst="roundRect">
+            <a:avLst>
+              <a:gd name="adj" fmla="val 18519"/>
+            </a:avLst>
+          </a:prstGeom>
+          <a:solidFill>
+            <a:srgbClr val="EEF2FB"/>
+          </a:solidFill>
+          <a:ln/>
+        </p:spPr>
+      </p:sp>
+      <p:sp>
+        <p:nvSpPr>
+          <p:cNvPr id="10" name="Text 8"/>
+          <p:cNvSpPr txBox="1"/>
+          <p:nvPr/>
+        </p:nvSpPr>
+        <p:spPr>
+          <a:xfrm>
+            <a:off x="10515600" y="2130552"/>
+            <a:ext cx="868680" cy="493776"/>
+          </a:xfrm>
+          <a:prstGeom prst="rect">
+            <a:avLst/>
+          </a:prstGeom>
+          <a:noFill/>
+          <a:ln/>
+        </p:spPr>
+        <p:txBody>
+          <a:bodyPr wrap="square" lIns="0" tIns="0" rIns="0" bIns="0" rtlCol="0" anchor="ctr"/>
+          <a:lstStyle/>
+          <a:p>
+            <a:pPr algn="ctr" indent="0" marL="0">
+              <a:buNone/>
+            </a:pPr>
+            <a:r>
+              <a:rPr lang="en-US" sz="1500" b="1" dirty="0">
+                <a:solidFill>
+                  <a:srgbClr val="2D63FF"/>
+                </a:solidFill>
+                <a:latin typeface="IBM Plex Mono" pitchFamily="34" charset="0"/>
+                <a:ea typeface="IBM Plex Mono" pitchFamily="34" charset="-122"/>
+                <a:cs typeface="IBM Plex Mono" pitchFamily="34" charset="-120"/>
+              </a:rPr>
+              <a:t>[3]</a:t>
+            </a:r>
+            <a:endParaRPr lang="en-US" sz="1500" dirty="0"/>
+          </a:p>
+        </p:txBody>
+      </p:sp>
+      <p:sp>
+        <p:nvSpPr>
+          <p:cNvPr id="11" name="Shape 9"/>
+          <p:cNvSpPr/>
+          <p:nvPr/>
+        </p:nvSpPr>
+        <p:spPr>
+          <a:xfrm>
+            <a:off x="502920" y="3127248"/>
+            <a:ext cx="11155680" cy="1097280"/>
+          </a:xfrm>
+          <a:prstGeom prst="roundRect">
+            <a:avLst>
+              <a:gd name="adj" fmla="val 10000"/>
+            </a:avLst>
+          </a:prstGeom>
+          <a:solidFill>
+            <a:srgbClr val="FFFFFF"/>
+          </a:solidFill>
+          <a:ln w="15875">
+            <a:solidFill>
+              <a:srgbClr val="D9DEE7"/>
+            </a:solidFill>
+            <a:prstDash val="solid"/>
+          </a:ln>
+        </p:spPr>
+      </p:sp>
+      <p:sp>
+        <p:nvSpPr>
+          <p:cNvPr id="12" name="Text 10"/>
+          <p:cNvSpPr txBox="1"/>
+          <p:nvPr/>
+        </p:nvSpPr>
+        <p:spPr>
+          <a:xfrm>
+            <a:off x="914400" y="3236976"/>
+            <a:ext cx="9418320" cy="877824"/>
+          </a:xfrm>
+          <a:prstGeom prst="rect">
+            <a:avLst/>
+          </a:prstGeom>
+          <a:noFill/>
+          <a:ln/>
+        </p:spPr>
+        <p:txBody>
+          <a:bodyPr wrap="square" lIns="0" tIns="0" rIns="0" bIns="0" rtlCol="0" anchor="ctr"/>
+          <a:lstStyle/>
+          <a:p>
+            <a:pPr indent="0" marL="0">
+              <a:lnSpc>
+                <a:spcPct val="118000"/>
+              </a:lnSpc>
+              <a:buNone/>
+            </a:pPr>
+            <a:r>
+              <a:rPr lang="en-US" sz="1700" dirty="0">
+                <a:solidFill>
+                  <a:srgbClr val="101828"/>
+                </a:solidFill>
+                <a:latin typeface="IBM Plex Sans" pitchFamily="34" charset="0"/>
+                <a:ea typeface="IBM Plex Sans" pitchFamily="34" charset="-122"/>
+                <a:cs typeface="IBM Plex Sans" pitchFamily="34" charset="-120"/>
+              </a:rPr>
+              <a:t>Write a program that reads a whole number and prints small when it is 10 or less, medium when it is more than 10 but 100 or less, and large when it is more than 100.</a:t>
+            </a:r>
+            <a:endParaRPr lang="en-US" sz="1700" dirty="0"/>
+          </a:p>
+        </p:txBody>
+      </p:sp>
+      <p:sp>
+        <p:nvSpPr>
+          <p:cNvPr id="13" name="Shape 11"/>
+          <p:cNvSpPr/>
+          <p:nvPr/>
+        </p:nvSpPr>
+        <p:spPr>
+          <a:xfrm>
+            <a:off x="10515600" y="3429000"/>
+            <a:ext cx="868680" cy="493776"/>
+          </a:xfrm>
+          <a:prstGeom prst="roundRect">
+            <a:avLst>
+              <a:gd name="adj" fmla="val 18519"/>
+            </a:avLst>
+          </a:prstGeom>
+          <a:solidFill>
+            <a:srgbClr val="EEF2FB"/>
+          </a:solidFill>
+          <a:ln/>
+        </p:spPr>
+      </p:sp>
+      <p:sp>
+        <p:nvSpPr>
+          <p:cNvPr id="14" name="Text 12"/>
+          <p:cNvSpPr txBox="1"/>
+          <p:nvPr/>
+        </p:nvSpPr>
+        <p:spPr>
+          <a:xfrm>
+            <a:off x="10515600" y="3429000"/>
+            <a:ext cx="868680" cy="493776"/>
+          </a:xfrm>
+          <a:prstGeom prst="rect">
+            <a:avLst/>
+          </a:prstGeom>
+          <a:noFill/>
+          <a:ln/>
+        </p:spPr>
+        <p:txBody>
+          <a:bodyPr wrap="square" lIns="0" tIns="0" rIns="0" bIns="0" rtlCol="0" anchor="ctr"/>
+          <a:lstStyle/>
+          <a:p>
+            <a:pPr algn="ctr" indent="0" marL="0">
+              <a:buNone/>
+            </a:pPr>
+            <a:r>
+              <a:rPr lang="en-US" sz="1500" b="1" dirty="0">
+                <a:solidFill>
+                  <a:srgbClr val="2D63FF"/>
+                </a:solidFill>
+                <a:latin typeface="IBM Plex Mono" pitchFamily="34" charset="0"/>
+                <a:ea typeface="IBM Plex Mono" pitchFamily="34" charset="-122"/>
+                <a:cs typeface="IBM Plex Mono" pitchFamily="34" charset="-120"/>
+              </a:rPr>
+              <a:t>[4]</a:t>
+            </a:r>
+            <a:endParaRPr lang="en-US" sz="1500" dirty="0"/>
+          </a:p>
+        </p:txBody>
+      </p:sp>
+      <p:sp>
+        <p:nvSpPr>
+          <p:cNvPr id="15" name="Shape 13"/>
+          <p:cNvSpPr/>
+          <p:nvPr/>
+        </p:nvSpPr>
+        <p:spPr>
+          <a:xfrm>
+            <a:off x="502920" y="4425696"/>
+            <a:ext cx="11155680" cy="1097280"/>
+          </a:xfrm>
+          <a:prstGeom prst="roundRect">
+            <a:avLst>
+              <a:gd name="adj" fmla="val 10000"/>
+            </a:avLst>
+          </a:prstGeom>
+          <a:solidFill>
+            <a:srgbClr val="FFFFFF"/>
+          </a:solidFill>
+          <a:ln w="15875">
+            <a:solidFill>
+              <a:srgbClr val="D9DEE7"/>
+            </a:solidFill>
+            <a:prstDash val="solid"/>
+          </a:ln>
+        </p:spPr>
+      </p:sp>
+      <p:sp>
+        <p:nvSpPr>
+          <p:cNvPr id="16" name="Text 14"/>
+          <p:cNvSpPr txBox="1"/>
+          <p:nvPr/>
+        </p:nvSpPr>
+        <p:spPr>
+          <a:xfrm>
+            <a:off x="914400" y="4535424"/>
+            <a:ext cx="9418320" cy="877824"/>
+          </a:xfrm>
+          <a:prstGeom prst="rect">
+            <a:avLst/>
+          </a:prstGeom>
+          <a:noFill/>
+          <a:ln/>
+        </p:spPr>
+        <p:txBody>
+          <a:bodyPr wrap="square" lIns="0" tIns="0" rIns="0" bIns="0" rtlCol="0" anchor="ctr"/>
+          <a:lstStyle/>
+          <a:p>
+            <a:pPr indent="0" marL="0">
+              <a:lnSpc>
+                <a:spcPct val="118000"/>
+              </a:lnSpc>
+              <a:buNone/>
+            </a:pPr>
+            <a:r>
+              <a:rPr lang="en-US" sz="1700" dirty="0">
+                <a:solidFill>
+                  <a:srgbClr val="101828"/>
+                </a:solidFill>
+                <a:latin typeface="IBM Plex Sans" pitchFamily="34" charset="0"/>
+                <a:ea typeface="IBM Plex Sans" pitchFamily="34" charset="-122"/>
+                <a:cs typeface="IBM Plex Sans" pitchFamily="34" charset="-120"/>
+              </a:rPr>
+              <a:t>Write a program that reads a whole number and then a word, and prints open only when the number is 3 or 7 and the word is not locked. Otherwise it prints refused.</a:t>
+            </a:r>
+            <a:endParaRPr lang="en-US" sz="1700" dirty="0"/>
+          </a:p>
+        </p:txBody>
+      </p:sp>
+      <p:sp>
+        <p:nvSpPr>
+          <p:cNvPr id="17" name="Shape 15"/>
+          <p:cNvSpPr/>
+          <p:nvPr/>
+        </p:nvSpPr>
+        <p:spPr>
+          <a:xfrm>
+            <a:off x="10515600" y="4727448"/>
+            <a:ext cx="868680" cy="493776"/>
+          </a:xfrm>
+          <a:prstGeom prst="roundRect">
+            <a:avLst>
+              <a:gd name="adj" fmla="val 18519"/>
+            </a:avLst>
+          </a:prstGeom>
+          <a:solidFill>
+            <a:srgbClr val="EEF2FB"/>
+          </a:solidFill>
+          <a:ln/>
+        </p:spPr>
+      </p:sp>
+      <p:sp>
+        <p:nvSpPr>
+          <p:cNvPr id="18" name="Text 16"/>
+          <p:cNvSpPr txBox="1"/>
+          <p:nvPr/>
+        </p:nvSpPr>
+        <p:spPr>
+          <a:xfrm>
+            <a:off x="10515600" y="4727448"/>
+            <a:ext cx="868680" cy="493776"/>
+          </a:xfrm>
+          <a:prstGeom prst="rect">
+            <a:avLst/>
+          </a:prstGeom>
+          <a:noFill/>
+          <a:ln/>
+        </p:spPr>
+        <p:txBody>
+          <a:bodyPr wrap="square" lIns="0" tIns="0" rIns="0" bIns="0" rtlCol="0" anchor="ctr"/>
+          <a:lstStyle/>
+          <a:p>
+            <a:pPr algn="ctr" indent="0" marL="0">
+              <a:buNone/>
+            </a:pPr>
+            <a:r>
+              <a:rPr lang="en-US" sz="1500" b="1" dirty="0">
+                <a:solidFill>
+                  <a:srgbClr val="2D63FF"/>
+                </a:solidFill>
+                <a:latin typeface="IBM Plex Mono" pitchFamily="34" charset="0"/>
+                <a:ea typeface="IBM Plex Mono" pitchFamily="34" charset="-122"/>
+                <a:cs typeface="IBM Plex Mono" pitchFamily="34" charset="-120"/>
+              </a:rPr>
+              <a:t>[4]</a:t>
+            </a:r>
+            <a:endParaRPr lang="en-US" sz="1500" dirty="0"/>
+          </a:p>
+        </p:txBody>
+      </p:sp>
+    </p:spTree>
+  </p:cSld>
+  <p:clrMapOvr>
+    <a:masterClrMapping/>
+  </p:clrMapOvr>
+</p:sld>
+</file>
+
+<file path=ppt/slides/slide15.xml><?xml version="1.0" encoding="utf-8"?>
+<p:sld xmlns:a="http://schemas.openxmlformats.org/drawingml/2006/main" xmlns:r="http://schemas.openxmlformats.org/officeDocument/2006/relationships" xmlns:p="http://schemas.openxmlformats.org/presentationml/2006/main">
+  <p:cSld name="Slide 15">
     <p:bg>
       <p:bgPr>
         <a:solidFill>
